--- a/assets/controller_map.pptx
+++ b/assets/controller_map.pptx
@@ -7,6 +7,8 @@
   <p:sldIdLst>
     <p:sldId id="256" r:id="rId2"/>
     <p:sldId id="257" r:id="rId3"/>
+    <p:sldId id="258" r:id="rId4"/>
+    <p:sldId id="259" r:id="rId5"/>
   </p:sldIdLst>
   <p:sldSz cx="12192000" cy="6858000"/>
   <p:notesSz cx="6858000" cy="9144000"/>
@@ -105,6 +107,11 @@
       </a:defRPr>
     </a:lvl9pPr>
   </p:defaultTextStyle>
+  <p:extLst>
+    <p:ext uri="{EFAFB233-063F-42B5-8137-9DF3F51BA10A}">
+      <p15:sldGuideLst xmlns:p15="http://schemas.microsoft.com/office/powerpoint/2012/main"/>
+    </p:ext>
+  </p:extLst>
 </p:presentation>
 </file>
 
@@ -255,7 +262,7 @@
           <a:p>
             <a:fld id="{5F439DAA-DD6E-4AD3-AD34-68D86F47C519}" type="datetimeFigureOut">
               <a:rPr kumimoji="1" lang="ja-JP" altLang="en-US" smtClean="0"/>
-              <a:t>2026/10/27</a:t>
+              <a:t>2026/10/30</a:t>
             </a:fld>
             <a:endParaRPr kumimoji="1" lang="ja-JP" altLang="en-US"/>
           </a:p>
@@ -485,7 +492,7 @@
           <a:p>
             <a:fld id="{5F439DAA-DD6E-4AD3-AD34-68D86F47C519}" type="datetimeFigureOut">
               <a:rPr kumimoji="1" lang="ja-JP" altLang="en-US" smtClean="0"/>
-              <a:t>2026/10/27</a:t>
+              <a:t>2026/10/30</a:t>
             </a:fld>
             <a:endParaRPr kumimoji="1" lang="ja-JP" altLang="en-US"/>
           </a:p>
@@ -725,7 +732,7 @@
           <a:p>
             <a:fld id="{5F439DAA-DD6E-4AD3-AD34-68D86F47C519}" type="datetimeFigureOut">
               <a:rPr kumimoji="1" lang="ja-JP" altLang="en-US" smtClean="0"/>
-              <a:t>2026/10/27</a:t>
+              <a:t>2026/10/30</a:t>
             </a:fld>
             <a:endParaRPr kumimoji="1" lang="ja-JP" altLang="en-US"/>
           </a:p>
@@ -955,7 +962,7 @@
           <a:p>
             <a:fld id="{5F439DAA-DD6E-4AD3-AD34-68D86F47C519}" type="datetimeFigureOut">
               <a:rPr kumimoji="1" lang="ja-JP" altLang="en-US" smtClean="0"/>
-              <a:t>2026/10/27</a:t>
+              <a:t>2026/10/30</a:t>
             </a:fld>
             <a:endParaRPr kumimoji="1" lang="ja-JP" altLang="en-US"/>
           </a:p>
@@ -1230,7 +1237,7 @@
           <a:p>
             <a:fld id="{5F439DAA-DD6E-4AD3-AD34-68D86F47C519}" type="datetimeFigureOut">
               <a:rPr kumimoji="1" lang="ja-JP" altLang="en-US" smtClean="0"/>
-              <a:t>2026/10/27</a:t>
+              <a:t>2026/10/30</a:t>
             </a:fld>
             <a:endParaRPr kumimoji="1" lang="ja-JP" altLang="en-US"/>
           </a:p>
@@ -1559,7 +1566,7 @@
           <a:p>
             <a:fld id="{5F439DAA-DD6E-4AD3-AD34-68D86F47C519}" type="datetimeFigureOut">
               <a:rPr kumimoji="1" lang="ja-JP" altLang="en-US" smtClean="0"/>
-              <a:t>2026/10/27</a:t>
+              <a:t>2026/10/30</a:t>
             </a:fld>
             <a:endParaRPr kumimoji="1" lang="ja-JP" altLang="en-US"/>
           </a:p>
@@ -2035,7 +2042,7 @@
           <a:p>
             <a:fld id="{5F439DAA-DD6E-4AD3-AD34-68D86F47C519}" type="datetimeFigureOut">
               <a:rPr kumimoji="1" lang="ja-JP" altLang="en-US" smtClean="0"/>
-              <a:t>2026/10/27</a:t>
+              <a:t>2026/10/30</a:t>
             </a:fld>
             <a:endParaRPr kumimoji="1" lang="ja-JP" altLang="en-US"/>
           </a:p>
@@ -2176,7 +2183,7 @@
           <a:p>
             <a:fld id="{5F439DAA-DD6E-4AD3-AD34-68D86F47C519}" type="datetimeFigureOut">
               <a:rPr kumimoji="1" lang="ja-JP" altLang="en-US" smtClean="0"/>
-              <a:t>2026/10/27</a:t>
+              <a:t>2026/10/30</a:t>
             </a:fld>
             <a:endParaRPr kumimoji="1" lang="ja-JP" altLang="en-US"/>
           </a:p>
@@ -2289,7 +2296,7 @@
           <a:p>
             <a:fld id="{5F439DAA-DD6E-4AD3-AD34-68D86F47C519}" type="datetimeFigureOut">
               <a:rPr kumimoji="1" lang="ja-JP" altLang="en-US" smtClean="0"/>
-              <a:t>2026/10/27</a:t>
+              <a:t>2026/10/30</a:t>
             </a:fld>
             <a:endParaRPr kumimoji="1" lang="ja-JP" altLang="en-US"/>
           </a:p>
@@ -2632,7 +2639,7 @@
           <a:p>
             <a:fld id="{5F439DAA-DD6E-4AD3-AD34-68D86F47C519}" type="datetimeFigureOut">
               <a:rPr kumimoji="1" lang="ja-JP" altLang="en-US" smtClean="0"/>
-              <a:t>2026/10/27</a:t>
+              <a:t>2026/10/30</a:t>
             </a:fld>
             <a:endParaRPr kumimoji="1" lang="ja-JP" altLang="en-US"/>
           </a:p>
@@ -2920,7 +2927,7 @@
           <a:p>
             <a:fld id="{5F439DAA-DD6E-4AD3-AD34-68D86F47C519}" type="datetimeFigureOut">
               <a:rPr kumimoji="1" lang="ja-JP" altLang="en-US" smtClean="0"/>
-              <a:t>2026/10/27</a:t>
+              <a:t>2026/10/30</a:t>
             </a:fld>
             <a:endParaRPr kumimoji="1" lang="ja-JP" altLang="en-US"/>
           </a:p>
@@ -3193,7 +3200,7 @@
           <a:p>
             <a:fld id="{5F439DAA-DD6E-4AD3-AD34-68D86F47C519}" type="datetimeFigureOut">
               <a:rPr kumimoji="1" lang="ja-JP" altLang="en-US" smtClean="0"/>
-              <a:t>2026/10/27</a:t>
+              <a:t>2026/10/30</a:t>
             </a:fld>
             <a:endParaRPr kumimoji="1" lang="ja-JP" altLang="en-US"/>
           </a:p>
@@ -3668,9 +3675,10 @@
           <a:lstStyle/>
           <a:p>
             <a:r>
-              <a:rPr kumimoji="1" lang="en-US" altLang="ja-JP" dirty="0"/>
-              <a:t>2026/10/27</a:t>
-            </a:r>
+              <a:rPr kumimoji="1" lang="en-US" altLang="ja-JP"/>
+              <a:t>2026/10/29</a:t>
+            </a:r>
+            <a:endParaRPr kumimoji="1" lang="en-US" altLang="ja-JP" dirty="0"/>
           </a:p>
           <a:p>
             <a:r>
@@ -6154,6 +6162,4820 @@
     <p:extLst>
       <p:ext uri="{BB962C8B-B14F-4D97-AF65-F5344CB8AC3E}">
         <p14:creationId xmlns:p14="http://schemas.microsoft.com/office/powerpoint/2010/main" val="2454200029"/>
+      </p:ext>
+    </p:extLst>
+  </p:cSld>
+  <p:clrMapOvr>
+    <a:masterClrMapping/>
+  </p:clrMapOvr>
+</p:sld>
+</file>
+
+<file path=ppt/slides/slide3.xml><?xml version="1.0" encoding="utf-8"?>
+<p:sld xmlns:a="http://schemas.openxmlformats.org/drawingml/2006/main" xmlns:r="http://schemas.openxmlformats.org/officeDocument/2006/relationships" xmlns:p="http://schemas.openxmlformats.org/presentationml/2006/main">
+  <p:cSld>
+    <p:spTree>
+      <p:nvGrpSpPr>
+        <p:cNvPr id="1" name=""/>
+        <p:cNvGrpSpPr/>
+        <p:nvPr/>
+      </p:nvGrpSpPr>
+      <p:grpSpPr>
+        <a:xfrm>
+          <a:off x="0" y="0"/>
+          <a:ext cx="0" cy="0"/>
+          <a:chOff x="0" y="0"/>
+          <a:chExt cx="0" cy="0"/>
+        </a:xfrm>
+      </p:grpSpPr>
+      <p:pic>
+        <p:nvPicPr>
+          <p:cNvPr id="3" name="図 2">
+            <a:extLst>
+              <a:ext uri="{FF2B5EF4-FFF2-40B4-BE49-F238E27FC236}">
+                <a16:creationId xmlns:a16="http://schemas.microsoft.com/office/drawing/2014/main" id="{7822CD29-48BE-3486-A7AA-6D2D6F1F0672}"/>
+              </a:ext>
+            </a:extLst>
+          </p:cNvPr>
+          <p:cNvPicPr>
+            <a:picLocks noChangeAspect="1"/>
+          </p:cNvPicPr>
+          <p:nvPr/>
+        </p:nvPicPr>
+        <p:blipFill>
+          <a:blip r:embed="rId2"/>
+          <a:stretch>
+            <a:fillRect/>
+          </a:stretch>
+        </p:blipFill>
+        <p:spPr>
+          <a:xfrm>
+            <a:off x="157018" y="574998"/>
+            <a:ext cx="5872390" cy="4005809"/>
+          </a:xfrm>
+          <a:prstGeom prst="rect">
+            <a:avLst/>
+          </a:prstGeom>
+        </p:spPr>
+      </p:pic>
+      <p:sp>
+        <p:nvSpPr>
+          <p:cNvPr id="4" name="矢印: 左右 3">
+            <a:extLst>
+              <a:ext uri="{FF2B5EF4-FFF2-40B4-BE49-F238E27FC236}">
+                <a16:creationId xmlns:a16="http://schemas.microsoft.com/office/drawing/2014/main" id="{0C39A422-7EA0-8162-C9F0-63BEC7C081D2}"/>
+              </a:ext>
+            </a:extLst>
+          </p:cNvPr>
+          <p:cNvSpPr/>
+          <p:nvPr/>
+        </p:nvSpPr>
+        <p:spPr>
+          <a:xfrm>
+            <a:off x="1560945" y="2863274"/>
+            <a:ext cx="1216152" cy="484632"/>
+          </a:xfrm>
+          <a:prstGeom prst="leftRightArrow">
+            <a:avLst/>
+          </a:prstGeom>
+        </p:spPr>
+        <p:style>
+          <a:lnRef idx="3">
+            <a:schemeClr val="lt1"/>
+          </a:lnRef>
+          <a:fillRef idx="1">
+            <a:schemeClr val="accent2"/>
+          </a:fillRef>
+          <a:effectRef idx="1">
+            <a:schemeClr val="accent2"/>
+          </a:effectRef>
+          <a:fontRef idx="minor">
+            <a:schemeClr val="lt1"/>
+          </a:fontRef>
+        </p:style>
+        <p:txBody>
+          <a:bodyPr rtlCol="0" anchor="ctr"/>
+          <a:lstStyle/>
+          <a:p>
+            <a:pPr algn="ctr"/>
+            <a:r>
+              <a:rPr kumimoji="1" lang="en-US" altLang="ja-JP" sz="900" dirty="0"/>
+              <a:t>-1      [0]     +1</a:t>
+            </a:r>
+            <a:endParaRPr kumimoji="1" lang="ja-JP" altLang="en-US" sz="900" dirty="0"/>
+          </a:p>
+        </p:txBody>
+      </p:sp>
+      <p:sp>
+        <p:nvSpPr>
+          <p:cNvPr id="5" name="矢印: 上下 4">
+            <a:extLst>
+              <a:ext uri="{FF2B5EF4-FFF2-40B4-BE49-F238E27FC236}">
+                <a16:creationId xmlns:a16="http://schemas.microsoft.com/office/drawing/2014/main" id="{178AA497-2724-47FE-9A33-C6C3B1F46248}"/>
+              </a:ext>
+            </a:extLst>
+          </p:cNvPr>
+          <p:cNvSpPr/>
+          <p:nvPr/>
+        </p:nvSpPr>
+        <p:spPr>
+          <a:xfrm>
+            <a:off x="1816191" y="3274016"/>
+            <a:ext cx="705660" cy="1216152"/>
+          </a:xfrm>
+          <a:prstGeom prst="upDownArrow">
+            <a:avLst/>
+          </a:prstGeom>
+        </p:spPr>
+        <p:style>
+          <a:lnRef idx="3">
+            <a:schemeClr val="lt1"/>
+          </a:lnRef>
+          <a:fillRef idx="1">
+            <a:schemeClr val="accent2"/>
+          </a:fillRef>
+          <a:effectRef idx="1">
+            <a:schemeClr val="accent2"/>
+          </a:effectRef>
+          <a:fontRef idx="minor">
+            <a:schemeClr val="lt1"/>
+          </a:fontRef>
+        </p:style>
+        <p:txBody>
+          <a:bodyPr rtlCol="0" anchor="ctr"/>
+          <a:lstStyle/>
+          <a:p>
+            <a:pPr algn="ctr"/>
+            <a:r>
+              <a:rPr kumimoji="1" lang="en-US" altLang="ja-JP" sz="900" dirty="0"/>
+              <a:t>-1</a:t>
+            </a:r>
+          </a:p>
+          <a:p>
+            <a:pPr algn="ctr"/>
+            <a:endParaRPr lang="en-US" altLang="ja-JP" sz="900" dirty="0"/>
+          </a:p>
+          <a:p>
+            <a:pPr algn="ctr"/>
+            <a:endParaRPr lang="en-US" altLang="ja-JP" sz="900" dirty="0"/>
+          </a:p>
+          <a:p>
+            <a:pPr algn="ctr"/>
+            <a:r>
+              <a:rPr kumimoji="1" lang="en-US" altLang="ja-JP" sz="900" dirty="0"/>
+              <a:t>[1]</a:t>
+            </a:r>
+          </a:p>
+          <a:p>
+            <a:pPr algn="ctr"/>
+            <a:endParaRPr lang="en-US" altLang="ja-JP" sz="900" dirty="0"/>
+          </a:p>
+          <a:p>
+            <a:pPr algn="ctr"/>
+            <a:endParaRPr lang="en-US" altLang="ja-JP" sz="900" dirty="0"/>
+          </a:p>
+          <a:p>
+            <a:pPr algn="ctr"/>
+            <a:r>
+              <a:rPr kumimoji="1" lang="en-US" altLang="ja-JP" sz="900" dirty="0"/>
+              <a:t>+1</a:t>
+            </a:r>
+            <a:endParaRPr kumimoji="1" lang="ja-JP" altLang="en-US" sz="900" dirty="0"/>
+          </a:p>
+        </p:txBody>
+      </p:sp>
+      <p:sp>
+        <p:nvSpPr>
+          <p:cNvPr id="7" name="矢印: 左右 6">
+            <a:extLst>
+              <a:ext uri="{FF2B5EF4-FFF2-40B4-BE49-F238E27FC236}">
+                <a16:creationId xmlns:a16="http://schemas.microsoft.com/office/drawing/2014/main" id="{54DCDDAD-5EDC-F06E-5E55-A2D7D3EB8B9C}"/>
+              </a:ext>
+            </a:extLst>
+          </p:cNvPr>
+          <p:cNvSpPr/>
+          <p:nvPr/>
+        </p:nvSpPr>
+        <p:spPr>
+          <a:xfrm>
+            <a:off x="3505200" y="2895325"/>
+            <a:ext cx="1216152" cy="484632"/>
+          </a:xfrm>
+          <a:prstGeom prst="leftRightArrow">
+            <a:avLst/>
+          </a:prstGeom>
+        </p:spPr>
+        <p:style>
+          <a:lnRef idx="3">
+            <a:schemeClr val="lt1"/>
+          </a:lnRef>
+          <a:fillRef idx="1">
+            <a:schemeClr val="accent2"/>
+          </a:fillRef>
+          <a:effectRef idx="1">
+            <a:schemeClr val="accent2"/>
+          </a:effectRef>
+          <a:fontRef idx="minor">
+            <a:schemeClr val="lt1"/>
+          </a:fontRef>
+        </p:style>
+        <p:txBody>
+          <a:bodyPr rtlCol="0" anchor="ctr"/>
+          <a:lstStyle/>
+          <a:p>
+            <a:pPr algn="ctr"/>
+            <a:r>
+              <a:rPr kumimoji="1" lang="en-US" altLang="ja-JP" sz="900" dirty="0"/>
+              <a:t>-1      [3]     +1</a:t>
+            </a:r>
+            <a:endParaRPr kumimoji="1" lang="ja-JP" altLang="en-US" sz="900" dirty="0"/>
+          </a:p>
+        </p:txBody>
+      </p:sp>
+      <p:sp>
+        <p:nvSpPr>
+          <p:cNvPr id="9" name="矢印: 上下 8">
+            <a:extLst>
+              <a:ext uri="{FF2B5EF4-FFF2-40B4-BE49-F238E27FC236}">
+                <a16:creationId xmlns:a16="http://schemas.microsoft.com/office/drawing/2014/main" id="{EC8FC360-B2F5-3A2A-53D8-B2EE0F8136C2}"/>
+              </a:ext>
+            </a:extLst>
+          </p:cNvPr>
+          <p:cNvSpPr/>
+          <p:nvPr/>
+        </p:nvSpPr>
+        <p:spPr>
+          <a:xfrm>
+            <a:off x="3760446" y="3274016"/>
+            <a:ext cx="705660" cy="1216152"/>
+          </a:xfrm>
+          <a:prstGeom prst="upDownArrow">
+            <a:avLst/>
+          </a:prstGeom>
+        </p:spPr>
+        <p:style>
+          <a:lnRef idx="3">
+            <a:schemeClr val="lt1"/>
+          </a:lnRef>
+          <a:fillRef idx="1">
+            <a:schemeClr val="accent2"/>
+          </a:fillRef>
+          <a:effectRef idx="1">
+            <a:schemeClr val="accent2"/>
+          </a:effectRef>
+          <a:fontRef idx="minor">
+            <a:schemeClr val="lt1"/>
+          </a:fontRef>
+        </p:style>
+        <p:txBody>
+          <a:bodyPr rtlCol="0" anchor="ctr"/>
+          <a:lstStyle/>
+          <a:p>
+            <a:pPr algn="ctr"/>
+            <a:r>
+              <a:rPr kumimoji="1" lang="en-US" altLang="ja-JP" sz="900" dirty="0"/>
+              <a:t>-1</a:t>
+            </a:r>
+          </a:p>
+          <a:p>
+            <a:pPr algn="ctr"/>
+            <a:endParaRPr lang="en-US" altLang="ja-JP" sz="900" dirty="0"/>
+          </a:p>
+          <a:p>
+            <a:pPr algn="ctr"/>
+            <a:endParaRPr lang="en-US" altLang="ja-JP" sz="900" dirty="0"/>
+          </a:p>
+          <a:p>
+            <a:pPr algn="ctr"/>
+            <a:r>
+              <a:rPr kumimoji="1" lang="en-US" altLang="ja-JP" sz="900" dirty="0"/>
+              <a:t>[4]</a:t>
+            </a:r>
+          </a:p>
+          <a:p>
+            <a:pPr algn="ctr"/>
+            <a:endParaRPr lang="en-US" altLang="ja-JP" sz="900" dirty="0"/>
+          </a:p>
+          <a:p>
+            <a:pPr algn="ctr"/>
+            <a:endParaRPr lang="en-US" altLang="ja-JP" sz="900" dirty="0"/>
+          </a:p>
+          <a:p>
+            <a:pPr algn="ctr"/>
+            <a:r>
+              <a:rPr kumimoji="1" lang="en-US" altLang="ja-JP" sz="900" dirty="0"/>
+              <a:t>+1</a:t>
+            </a:r>
+            <a:endParaRPr kumimoji="1" lang="ja-JP" altLang="en-US" sz="900" dirty="0"/>
+          </a:p>
+        </p:txBody>
+      </p:sp>
+      <p:sp>
+        <p:nvSpPr>
+          <p:cNvPr id="10" name="フローチャート: 結合子 9">
+            <a:extLst>
+              <a:ext uri="{FF2B5EF4-FFF2-40B4-BE49-F238E27FC236}">
+                <a16:creationId xmlns:a16="http://schemas.microsoft.com/office/drawing/2014/main" id="{7527F251-4BF0-E438-A278-98D2E2C87BC7}"/>
+              </a:ext>
+            </a:extLst>
+          </p:cNvPr>
+          <p:cNvSpPr/>
+          <p:nvPr/>
+        </p:nvSpPr>
+        <p:spPr>
+          <a:xfrm>
+            <a:off x="1940421" y="2195946"/>
+            <a:ext cx="457200" cy="457200"/>
+          </a:xfrm>
+          <a:prstGeom prst="flowChartConnector">
+            <a:avLst/>
+          </a:prstGeom>
+        </p:spPr>
+        <p:style>
+          <a:lnRef idx="3">
+            <a:schemeClr val="lt1"/>
+          </a:lnRef>
+          <a:fillRef idx="1">
+            <a:schemeClr val="accent5"/>
+          </a:fillRef>
+          <a:effectRef idx="1">
+            <a:schemeClr val="accent5"/>
+          </a:effectRef>
+          <a:fontRef idx="minor">
+            <a:schemeClr val="lt1"/>
+          </a:fontRef>
+        </p:style>
+        <p:txBody>
+          <a:bodyPr rtlCol="0" anchor="ctr"/>
+          <a:lstStyle/>
+          <a:p>
+            <a:pPr algn="ctr"/>
+            <a:r>
+              <a:rPr kumimoji="1" lang="en-US" altLang="ja-JP" sz="1200" dirty="0"/>
+              <a:t>9</a:t>
+            </a:r>
+            <a:endParaRPr kumimoji="1" lang="ja-JP" altLang="en-US" sz="1200" dirty="0"/>
+          </a:p>
+        </p:txBody>
+      </p:sp>
+      <p:sp>
+        <p:nvSpPr>
+          <p:cNvPr id="13" name="フローチャート: 結合子 12">
+            <a:extLst>
+              <a:ext uri="{FF2B5EF4-FFF2-40B4-BE49-F238E27FC236}">
+                <a16:creationId xmlns:a16="http://schemas.microsoft.com/office/drawing/2014/main" id="{ABE69A7A-C89B-2DAB-12C4-46366CCCB1E9}"/>
+              </a:ext>
+            </a:extLst>
+          </p:cNvPr>
+          <p:cNvSpPr/>
+          <p:nvPr/>
+        </p:nvSpPr>
+        <p:spPr>
+          <a:xfrm>
+            <a:off x="3884676" y="2195946"/>
+            <a:ext cx="457200" cy="457200"/>
+          </a:xfrm>
+          <a:prstGeom prst="flowChartConnector">
+            <a:avLst/>
+          </a:prstGeom>
+        </p:spPr>
+        <p:style>
+          <a:lnRef idx="3">
+            <a:schemeClr val="lt1"/>
+          </a:lnRef>
+          <a:fillRef idx="1">
+            <a:schemeClr val="accent5"/>
+          </a:fillRef>
+          <a:effectRef idx="1">
+            <a:schemeClr val="accent5"/>
+          </a:effectRef>
+          <a:fontRef idx="minor">
+            <a:schemeClr val="lt1"/>
+          </a:fontRef>
+        </p:style>
+        <p:txBody>
+          <a:bodyPr rtlCol="0" anchor="ctr"/>
+          <a:lstStyle/>
+          <a:p>
+            <a:pPr algn="ctr"/>
+            <a:r>
+              <a:rPr lang="en-US" altLang="ja-JP" sz="1000" dirty="0"/>
+              <a:t>10</a:t>
+            </a:r>
+            <a:endParaRPr kumimoji="1" lang="ja-JP" altLang="en-US" sz="1000" dirty="0"/>
+          </a:p>
+        </p:txBody>
+      </p:sp>
+      <p:sp>
+        <p:nvSpPr>
+          <p:cNvPr id="17" name="フローチャート: 結合子 16">
+            <a:extLst>
+              <a:ext uri="{FF2B5EF4-FFF2-40B4-BE49-F238E27FC236}">
+                <a16:creationId xmlns:a16="http://schemas.microsoft.com/office/drawing/2014/main" id="{00D885EF-5754-1E34-5D74-598373A468DA}"/>
+              </a:ext>
+            </a:extLst>
+          </p:cNvPr>
+          <p:cNvSpPr/>
+          <p:nvPr/>
+        </p:nvSpPr>
+        <p:spPr>
+          <a:xfrm>
+            <a:off x="2897124" y="2534029"/>
+            <a:ext cx="457200" cy="457200"/>
+          </a:xfrm>
+          <a:prstGeom prst="flowChartConnector">
+            <a:avLst/>
+          </a:prstGeom>
+        </p:spPr>
+        <p:style>
+          <a:lnRef idx="3">
+            <a:schemeClr val="lt1"/>
+          </a:lnRef>
+          <a:fillRef idx="1">
+            <a:schemeClr val="accent5"/>
+          </a:fillRef>
+          <a:effectRef idx="1">
+            <a:schemeClr val="accent5"/>
+          </a:effectRef>
+          <a:fontRef idx="minor">
+            <a:schemeClr val="lt1"/>
+          </a:fontRef>
+        </p:style>
+        <p:txBody>
+          <a:bodyPr rtlCol="0" anchor="ctr"/>
+          <a:lstStyle/>
+          <a:p>
+            <a:pPr algn="ctr"/>
+            <a:r>
+              <a:rPr lang="en-US" altLang="ja-JP" sz="1200" dirty="0"/>
+              <a:t>8</a:t>
+            </a:r>
+            <a:endParaRPr kumimoji="1" lang="ja-JP" altLang="en-US" sz="1200" dirty="0"/>
+          </a:p>
+        </p:txBody>
+      </p:sp>
+      <p:sp>
+        <p:nvSpPr>
+          <p:cNvPr id="19" name="フローチャート: 結合子 18">
+            <a:extLst>
+              <a:ext uri="{FF2B5EF4-FFF2-40B4-BE49-F238E27FC236}">
+                <a16:creationId xmlns:a16="http://schemas.microsoft.com/office/drawing/2014/main" id="{49CCB79B-8A9B-DAF2-A22C-261F4DAA2EFE}"/>
+              </a:ext>
+            </a:extLst>
+          </p:cNvPr>
+          <p:cNvSpPr/>
+          <p:nvPr/>
+        </p:nvSpPr>
+        <p:spPr>
+          <a:xfrm>
+            <a:off x="2330657" y="999991"/>
+            <a:ext cx="457200" cy="457200"/>
+          </a:xfrm>
+          <a:prstGeom prst="flowChartConnector">
+            <a:avLst/>
+          </a:prstGeom>
+        </p:spPr>
+        <p:style>
+          <a:lnRef idx="3">
+            <a:schemeClr val="lt1"/>
+          </a:lnRef>
+          <a:fillRef idx="1">
+            <a:schemeClr val="accent5"/>
+          </a:fillRef>
+          <a:effectRef idx="1">
+            <a:schemeClr val="accent5"/>
+          </a:effectRef>
+          <a:fontRef idx="minor">
+            <a:schemeClr val="lt1"/>
+          </a:fontRef>
+        </p:style>
+        <p:txBody>
+          <a:bodyPr rtlCol="0" anchor="ctr"/>
+          <a:lstStyle/>
+          <a:p>
+            <a:pPr algn="ctr"/>
+            <a:r>
+              <a:rPr kumimoji="1" lang="en-US" altLang="ja-JP" sz="1200" dirty="0"/>
+              <a:t>6</a:t>
+            </a:r>
+            <a:endParaRPr kumimoji="1" lang="ja-JP" altLang="en-US" sz="1200" dirty="0"/>
+          </a:p>
+        </p:txBody>
+      </p:sp>
+      <p:sp>
+        <p:nvSpPr>
+          <p:cNvPr id="21" name="フローチャート: 結合子 20">
+            <a:extLst>
+              <a:ext uri="{FF2B5EF4-FFF2-40B4-BE49-F238E27FC236}">
+                <a16:creationId xmlns:a16="http://schemas.microsoft.com/office/drawing/2014/main" id="{B6D15A7A-AD97-575F-C31E-E2E8280C0836}"/>
+              </a:ext>
+            </a:extLst>
+          </p:cNvPr>
+          <p:cNvSpPr/>
+          <p:nvPr/>
+        </p:nvSpPr>
+        <p:spPr>
+          <a:xfrm>
+            <a:off x="3405124" y="999991"/>
+            <a:ext cx="457200" cy="457200"/>
+          </a:xfrm>
+          <a:prstGeom prst="flowChartConnector">
+            <a:avLst/>
+          </a:prstGeom>
+        </p:spPr>
+        <p:style>
+          <a:lnRef idx="3">
+            <a:schemeClr val="lt1"/>
+          </a:lnRef>
+          <a:fillRef idx="1">
+            <a:schemeClr val="accent5"/>
+          </a:fillRef>
+          <a:effectRef idx="1">
+            <a:schemeClr val="accent5"/>
+          </a:effectRef>
+          <a:fontRef idx="minor">
+            <a:schemeClr val="lt1"/>
+          </a:fontRef>
+        </p:style>
+        <p:txBody>
+          <a:bodyPr rtlCol="0" anchor="ctr"/>
+          <a:lstStyle/>
+          <a:p>
+            <a:pPr algn="ctr"/>
+            <a:r>
+              <a:rPr lang="en-US" altLang="ja-JP" sz="1200" dirty="0"/>
+              <a:t>7</a:t>
+            </a:r>
+            <a:endParaRPr kumimoji="1" lang="ja-JP" altLang="en-US" sz="1200" dirty="0"/>
+          </a:p>
+        </p:txBody>
+      </p:sp>
+      <p:sp>
+        <p:nvSpPr>
+          <p:cNvPr id="23" name="フローチャート: 結合子 22">
+            <a:extLst>
+              <a:ext uri="{FF2B5EF4-FFF2-40B4-BE49-F238E27FC236}">
+                <a16:creationId xmlns:a16="http://schemas.microsoft.com/office/drawing/2014/main" id="{45C7DE08-0028-532A-F6A1-8DEF20287290}"/>
+              </a:ext>
+            </a:extLst>
+          </p:cNvPr>
+          <p:cNvSpPr/>
+          <p:nvPr/>
+        </p:nvSpPr>
+        <p:spPr>
+          <a:xfrm>
+            <a:off x="4039988" y="1389057"/>
+            <a:ext cx="457200" cy="457200"/>
+          </a:xfrm>
+          <a:prstGeom prst="flowChartConnector">
+            <a:avLst/>
+          </a:prstGeom>
+        </p:spPr>
+        <p:style>
+          <a:lnRef idx="3">
+            <a:schemeClr val="lt1"/>
+          </a:lnRef>
+          <a:fillRef idx="1">
+            <a:schemeClr val="accent5"/>
+          </a:fillRef>
+          <a:effectRef idx="1">
+            <a:schemeClr val="accent5"/>
+          </a:effectRef>
+          <a:fontRef idx="minor">
+            <a:schemeClr val="lt1"/>
+          </a:fontRef>
+        </p:style>
+        <p:txBody>
+          <a:bodyPr rtlCol="0" anchor="ctr"/>
+          <a:lstStyle/>
+          <a:p>
+            <a:pPr algn="ctr"/>
+            <a:r>
+              <a:rPr kumimoji="1" lang="en-US" altLang="ja-JP" sz="1200" dirty="0"/>
+              <a:t>2</a:t>
+            </a:r>
+            <a:endParaRPr kumimoji="1" lang="ja-JP" altLang="en-US" sz="1200" dirty="0"/>
+          </a:p>
+        </p:txBody>
+      </p:sp>
+      <p:sp>
+        <p:nvSpPr>
+          <p:cNvPr id="25" name="フローチャート: 結合子 24">
+            <a:extLst>
+              <a:ext uri="{FF2B5EF4-FFF2-40B4-BE49-F238E27FC236}">
+                <a16:creationId xmlns:a16="http://schemas.microsoft.com/office/drawing/2014/main" id="{6B9D8CAE-AEBB-82AB-5BFD-04F507493FA0}"/>
+              </a:ext>
+            </a:extLst>
+          </p:cNvPr>
+          <p:cNvSpPr/>
+          <p:nvPr/>
+        </p:nvSpPr>
+        <p:spPr>
+          <a:xfrm>
+            <a:off x="4607331" y="1997104"/>
+            <a:ext cx="457200" cy="457200"/>
+          </a:xfrm>
+          <a:prstGeom prst="flowChartConnector">
+            <a:avLst/>
+          </a:prstGeom>
+        </p:spPr>
+        <p:style>
+          <a:lnRef idx="3">
+            <a:schemeClr val="lt1"/>
+          </a:lnRef>
+          <a:fillRef idx="1">
+            <a:schemeClr val="accent5"/>
+          </a:fillRef>
+          <a:effectRef idx="1">
+            <a:schemeClr val="accent5"/>
+          </a:effectRef>
+          <a:fontRef idx="minor">
+            <a:schemeClr val="lt1"/>
+          </a:fontRef>
+        </p:style>
+        <p:txBody>
+          <a:bodyPr rtlCol="0" anchor="ctr"/>
+          <a:lstStyle/>
+          <a:p>
+            <a:pPr algn="ctr"/>
+            <a:r>
+              <a:rPr lang="en-US" altLang="ja-JP" sz="1200" dirty="0"/>
+              <a:t>0</a:t>
+            </a:r>
+            <a:endParaRPr kumimoji="1" lang="ja-JP" altLang="en-US" sz="1200" dirty="0"/>
+          </a:p>
+        </p:txBody>
+      </p:sp>
+      <p:sp>
+        <p:nvSpPr>
+          <p:cNvPr id="27" name="フローチャート: 結合子 26">
+            <a:extLst>
+              <a:ext uri="{FF2B5EF4-FFF2-40B4-BE49-F238E27FC236}">
+                <a16:creationId xmlns:a16="http://schemas.microsoft.com/office/drawing/2014/main" id="{5DCF2F5D-8CEF-B95B-6D0C-160B1AFDCD62}"/>
+              </a:ext>
+            </a:extLst>
+          </p:cNvPr>
+          <p:cNvSpPr/>
+          <p:nvPr/>
+        </p:nvSpPr>
+        <p:spPr>
+          <a:xfrm>
+            <a:off x="5114455" y="1457191"/>
+            <a:ext cx="457200" cy="457200"/>
+          </a:xfrm>
+          <a:prstGeom prst="flowChartConnector">
+            <a:avLst/>
+          </a:prstGeom>
+        </p:spPr>
+        <p:style>
+          <a:lnRef idx="3">
+            <a:schemeClr val="lt1"/>
+          </a:lnRef>
+          <a:fillRef idx="1">
+            <a:schemeClr val="accent5"/>
+          </a:fillRef>
+          <a:effectRef idx="1">
+            <a:schemeClr val="accent5"/>
+          </a:effectRef>
+          <a:fontRef idx="minor">
+            <a:schemeClr val="lt1"/>
+          </a:fontRef>
+        </p:style>
+        <p:txBody>
+          <a:bodyPr rtlCol="0" anchor="ctr"/>
+          <a:lstStyle/>
+          <a:p>
+            <a:pPr algn="ctr"/>
+            <a:r>
+              <a:rPr kumimoji="1" lang="en-US" altLang="ja-JP" sz="1200" dirty="0"/>
+              <a:t>1</a:t>
+            </a:r>
+            <a:endParaRPr kumimoji="1" lang="ja-JP" altLang="en-US" sz="1200" dirty="0"/>
+          </a:p>
+        </p:txBody>
+      </p:sp>
+      <p:sp>
+        <p:nvSpPr>
+          <p:cNvPr id="29" name="フローチャート: 結合子 28">
+            <a:extLst>
+              <a:ext uri="{FF2B5EF4-FFF2-40B4-BE49-F238E27FC236}">
+                <a16:creationId xmlns:a16="http://schemas.microsoft.com/office/drawing/2014/main" id="{13E1441E-7517-74F1-05D2-795A662DC335}"/>
+              </a:ext>
+            </a:extLst>
+          </p:cNvPr>
+          <p:cNvSpPr/>
+          <p:nvPr/>
+        </p:nvSpPr>
+        <p:spPr>
+          <a:xfrm>
+            <a:off x="4530391" y="886893"/>
+            <a:ext cx="457200" cy="457200"/>
+          </a:xfrm>
+          <a:prstGeom prst="flowChartConnector">
+            <a:avLst/>
+          </a:prstGeom>
+        </p:spPr>
+        <p:style>
+          <a:lnRef idx="3">
+            <a:schemeClr val="lt1"/>
+          </a:lnRef>
+          <a:fillRef idx="1">
+            <a:schemeClr val="accent5"/>
+          </a:fillRef>
+          <a:effectRef idx="1">
+            <a:schemeClr val="accent5"/>
+          </a:effectRef>
+          <a:fontRef idx="minor">
+            <a:schemeClr val="lt1"/>
+          </a:fontRef>
+        </p:style>
+        <p:txBody>
+          <a:bodyPr rtlCol="0" anchor="ctr"/>
+          <a:lstStyle/>
+          <a:p>
+            <a:pPr algn="ctr"/>
+            <a:r>
+              <a:rPr lang="en-US" altLang="ja-JP" sz="1200" dirty="0"/>
+              <a:t>3</a:t>
+            </a:r>
+            <a:endParaRPr kumimoji="1" lang="ja-JP" altLang="en-US" sz="1200" dirty="0"/>
+          </a:p>
+        </p:txBody>
+      </p:sp>
+      <p:sp>
+        <p:nvSpPr>
+          <p:cNvPr id="30" name="テキスト ボックス 29">
+            <a:extLst>
+              <a:ext uri="{FF2B5EF4-FFF2-40B4-BE49-F238E27FC236}">
+                <a16:creationId xmlns:a16="http://schemas.microsoft.com/office/drawing/2014/main" id="{CC410219-03C6-DFC4-F77F-5DBD9DE4C6CC}"/>
+              </a:ext>
+            </a:extLst>
+          </p:cNvPr>
+          <p:cNvSpPr txBox="1"/>
+          <p:nvPr/>
+        </p:nvSpPr>
+        <p:spPr>
+          <a:xfrm>
+            <a:off x="157018" y="582260"/>
+            <a:ext cx="966931" cy="646331"/>
+          </a:xfrm>
+          <a:prstGeom prst="rect">
+            <a:avLst/>
+          </a:prstGeom>
+          <a:noFill/>
+        </p:spPr>
+        <p:txBody>
+          <a:bodyPr wrap="none" rtlCol="0">
+            <a:spAutoFit/>
+          </a:bodyPr>
+          <a:lstStyle/>
+          <a:p>
+            <a:r>
+              <a:rPr kumimoji="1" lang="en-US" altLang="ja-JP" sz="1200" dirty="0">
+                <a:solidFill>
+                  <a:schemeClr val="bg1"/>
+                </a:solidFill>
+              </a:rPr>
+              <a:t>ELECOM</a:t>
+            </a:r>
+          </a:p>
+          <a:p>
+            <a:r>
+              <a:rPr lang="en-US" altLang="ja-JP" sz="1200" dirty="0">
+                <a:solidFill>
+                  <a:schemeClr val="bg1"/>
+                </a:solidFill>
+              </a:rPr>
+              <a:t>JC-U4113S</a:t>
+            </a:r>
+          </a:p>
+          <a:p>
+            <a:r>
+              <a:rPr kumimoji="1" lang="en-US" altLang="ja-JP" sz="1200" dirty="0">
+                <a:solidFill>
+                  <a:schemeClr val="bg1"/>
+                </a:solidFill>
+              </a:rPr>
+              <a:t>X-mode</a:t>
+            </a:r>
+            <a:endParaRPr kumimoji="1" lang="ja-JP" altLang="en-US" sz="1200" dirty="0">
+              <a:solidFill>
+                <a:schemeClr val="bg1"/>
+              </a:solidFill>
+            </a:endParaRPr>
+          </a:p>
+        </p:txBody>
+      </p:sp>
+      <p:pic>
+        <p:nvPicPr>
+          <p:cNvPr id="32" name="図 31">
+            <a:extLst>
+              <a:ext uri="{FF2B5EF4-FFF2-40B4-BE49-F238E27FC236}">
+                <a16:creationId xmlns:a16="http://schemas.microsoft.com/office/drawing/2014/main" id="{EACF721A-F93E-474D-DC1B-18C18F4C004A}"/>
+              </a:ext>
+            </a:extLst>
+          </p:cNvPr>
+          <p:cNvPicPr>
+            <a:picLocks noChangeAspect="1"/>
+          </p:cNvPicPr>
+          <p:nvPr/>
+        </p:nvPicPr>
+        <p:blipFill>
+          <a:blip r:embed="rId3"/>
+          <a:stretch>
+            <a:fillRect/>
+          </a:stretch>
+        </p:blipFill>
+        <p:spPr>
+          <a:xfrm>
+            <a:off x="6162594" y="999991"/>
+            <a:ext cx="5882311" cy="2794483"/>
+          </a:xfrm>
+          <a:prstGeom prst="rect">
+            <a:avLst/>
+          </a:prstGeom>
+        </p:spPr>
+      </p:pic>
+      <p:sp>
+        <p:nvSpPr>
+          <p:cNvPr id="33" name="矢印: 下 32">
+            <a:extLst>
+              <a:ext uri="{FF2B5EF4-FFF2-40B4-BE49-F238E27FC236}">
+                <a16:creationId xmlns:a16="http://schemas.microsoft.com/office/drawing/2014/main" id="{5B5B3DE6-A814-A14E-49E5-696C1E432ADA}"/>
+              </a:ext>
+            </a:extLst>
+          </p:cNvPr>
+          <p:cNvSpPr/>
+          <p:nvPr/>
+        </p:nvSpPr>
+        <p:spPr>
+          <a:xfrm>
+            <a:off x="7216003" y="1042476"/>
+            <a:ext cx="757382" cy="914400"/>
+          </a:xfrm>
+          <a:prstGeom prst="downArrow">
+            <a:avLst/>
+          </a:prstGeom>
+        </p:spPr>
+        <p:style>
+          <a:lnRef idx="3">
+            <a:schemeClr val="lt1"/>
+          </a:lnRef>
+          <a:fillRef idx="1">
+            <a:schemeClr val="accent2"/>
+          </a:fillRef>
+          <a:effectRef idx="1">
+            <a:schemeClr val="accent2"/>
+          </a:effectRef>
+          <a:fontRef idx="minor">
+            <a:schemeClr val="lt1"/>
+          </a:fontRef>
+        </p:style>
+        <p:txBody>
+          <a:bodyPr rtlCol="0" anchor="ctr"/>
+          <a:lstStyle/>
+          <a:p>
+            <a:pPr algn="ctr"/>
+            <a:r>
+              <a:rPr lang="en-US" altLang="ja-JP" sz="800" dirty="0"/>
+              <a:t>-1</a:t>
+            </a:r>
+          </a:p>
+          <a:p>
+            <a:pPr algn="ctr"/>
+            <a:endParaRPr lang="en-US" altLang="ja-JP" sz="800" dirty="0"/>
+          </a:p>
+          <a:p>
+            <a:pPr algn="ctr"/>
+            <a:r>
+              <a:rPr lang="en-US" altLang="ja-JP" sz="800" dirty="0"/>
+              <a:t>[2]</a:t>
+            </a:r>
+          </a:p>
+          <a:p>
+            <a:pPr algn="ctr"/>
+            <a:endParaRPr kumimoji="1" lang="en-US" altLang="ja-JP" sz="800" dirty="0"/>
+          </a:p>
+          <a:p>
+            <a:pPr algn="ctr"/>
+            <a:r>
+              <a:rPr lang="en-US" altLang="ja-JP" sz="800" dirty="0"/>
+              <a:t>+1</a:t>
+            </a:r>
+            <a:endParaRPr kumimoji="1" lang="ja-JP" altLang="en-US" sz="800" dirty="0"/>
+          </a:p>
+        </p:txBody>
+      </p:sp>
+      <p:sp>
+        <p:nvSpPr>
+          <p:cNvPr id="35" name="矢印: 下 34">
+            <a:extLst>
+              <a:ext uri="{FF2B5EF4-FFF2-40B4-BE49-F238E27FC236}">
+                <a16:creationId xmlns:a16="http://schemas.microsoft.com/office/drawing/2014/main" id="{E315673B-C884-5DE6-F5FC-361357C6BE22}"/>
+              </a:ext>
+            </a:extLst>
+          </p:cNvPr>
+          <p:cNvSpPr/>
+          <p:nvPr/>
+        </p:nvSpPr>
+        <p:spPr>
+          <a:xfrm>
+            <a:off x="10235229" y="1101465"/>
+            <a:ext cx="757382" cy="914400"/>
+          </a:xfrm>
+          <a:prstGeom prst="downArrow">
+            <a:avLst/>
+          </a:prstGeom>
+        </p:spPr>
+        <p:style>
+          <a:lnRef idx="3">
+            <a:schemeClr val="lt1"/>
+          </a:lnRef>
+          <a:fillRef idx="1">
+            <a:schemeClr val="accent2"/>
+          </a:fillRef>
+          <a:effectRef idx="1">
+            <a:schemeClr val="accent2"/>
+          </a:effectRef>
+          <a:fontRef idx="minor">
+            <a:schemeClr val="lt1"/>
+          </a:fontRef>
+        </p:style>
+        <p:txBody>
+          <a:bodyPr rtlCol="0" anchor="ctr"/>
+          <a:lstStyle/>
+          <a:p>
+            <a:pPr algn="ctr"/>
+            <a:r>
+              <a:rPr lang="en-US" altLang="ja-JP" sz="800" dirty="0"/>
+              <a:t>-1</a:t>
+            </a:r>
+          </a:p>
+          <a:p>
+            <a:pPr algn="ctr"/>
+            <a:endParaRPr lang="en-US" altLang="ja-JP" sz="800" dirty="0"/>
+          </a:p>
+          <a:p>
+            <a:pPr algn="ctr"/>
+            <a:r>
+              <a:rPr lang="en-US" altLang="ja-JP" sz="800" dirty="0"/>
+              <a:t>[5]</a:t>
+            </a:r>
+          </a:p>
+          <a:p>
+            <a:pPr algn="ctr"/>
+            <a:endParaRPr kumimoji="1" lang="en-US" altLang="ja-JP" sz="800" dirty="0"/>
+          </a:p>
+          <a:p>
+            <a:pPr algn="ctr"/>
+            <a:r>
+              <a:rPr lang="en-US" altLang="ja-JP" sz="800" dirty="0"/>
+              <a:t>+1</a:t>
+            </a:r>
+            <a:endParaRPr kumimoji="1" lang="ja-JP" altLang="en-US" sz="800" dirty="0"/>
+          </a:p>
+        </p:txBody>
+      </p:sp>
+      <p:sp>
+        <p:nvSpPr>
+          <p:cNvPr id="36" name="テキスト ボックス 35">
+            <a:extLst>
+              <a:ext uri="{FF2B5EF4-FFF2-40B4-BE49-F238E27FC236}">
+                <a16:creationId xmlns:a16="http://schemas.microsoft.com/office/drawing/2014/main" id="{08080621-4F85-D3E0-AF1C-48D593AA0574}"/>
+              </a:ext>
+            </a:extLst>
+          </p:cNvPr>
+          <p:cNvSpPr txBox="1"/>
+          <p:nvPr/>
+        </p:nvSpPr>
+        <p:spPr>
+          <a:xfrm>
+            <a:off x="6696276" y="1300514"/>
+            <a:ext cx="500458" cy="276999"/>
+          </a:xfrm>
+          <a:prstGeom prst="rect">
+            <a:avLst/>
+          </a:prstGeom>
+          <a:noFill/>
+        </p:spPr>
+        <p:txBody>
+          <a:bodyPr wrap="none" rtlCol="0">
+            <a:spAutoFit/>
+          </a:bodyPr>
+          <a:lstStyle/>
+          <a:p>
+            <a:r>
+              <a:rPr lang="en-US" altLang="ja-JP" sz="1200" dirty="0">
+                <a:solidFill>
+                  <a:schemeClr val="bg1"/>
+                </a:solidFill>
+              </a:rPr>
+              <a:t>7:LT</a:t>
+            </a:r>
+            <a:endParaRPr kumimoji="1" lang="ja-JP" altLang="en-US" sz="1200" dirty="0">
+              <a:solidFill>
+                <a:schemeClr val="bg1"/>
+              </a:solidFill>
+            </a:endParaRPr>
+          </a:p>
+        </p:txBody>
+      </p:sp>
+      <p:sp>
+        <p:nvSpPr>
+          <p:cNvPr id="38" name="テキスト ボックス 37">
+            <a:extLst>
+              <a:ext uri="{FF2B5EF4-FFF2-40B4-BE49-F238E27FC236}">
+                <a16:creationId xmlns:a16="http://schemas.microsoft.com/office/drawing/2014/main" id="{B492C775-CFE9-3F9D-7BAC-09B52CDA5275}"/>
+              </a:ext>
+            </a:extLst>
+          </p:cNvPr>
+          <p:cNvSpPr txBox="1"/>
+          <p:nvPr/>
+        </p:nvSpPr>
+        <p:spPr>
+          <a:xfrm>
+            <a:off x="10943816" y="1358874"/>
+            <a:ext cx="511679" cy="276999"/>
+          </a:xfrm>
+          <a:prstGeom prst="rect">
+            <a:avLst/>
+          </a:prstGeom>
+          <a:noFill/>
+        </p:spPr>
+        <p:txBody>
+          <a:bodyPr wrap="none" rtlCol="0">
+            <a:spAutoFit/>
+          </a:bodyPr>
+          <a:lstStyle/>
+          <a:p>
+            <a:r>
+              <a:rPr lang="en-US" altLang="ja-JP" sz="1200" dirty="0">
+                <a:solidFill>
+                  <a:schemeClr val="bg1"/>
+                </a:solidFill>
+              </a:rPr>
+              <a:t>8:RT</a:t>
+            </a:r>
+            <a:endParaRPr kumimoji="1" lang="ja-JP" altLang="en-US" sz="1200" dirty="0">
+              <a:solidFill>
+                <a:schemeClr val="bg1"/>
+              </a:solidFill>
+            </a:endParaRPr>
+          </a:p>
+        </p:txBody>
+      </p:sp>
+      <p:sp>
+        <p:nvSpPr>
+          <p:cNvPr id="40" name="テキスト ボックス 39">
+            <a:extLst>
+              <a:ext uri="{FF2B5EF4-FFF2-40B4-BE49-F238E27FC236}">
+                <a16:creationId xmlns:a16="http://schemas.microsoft.com/office/drawing/2014/main" id="{EC4E8541-09F7-4845-7735-E5F0A4213282}"/>
+              </a:ext>
+            </a:extLst>
+          </p:cNvPr>
+          <p:cNvSpPr txBox="1"/>
+          <p:nvPr/>
+        </p:nvSpPr>
+        <p:spPr>
+          <a:xfrm>
+            <a:off x="6287557" y="1937684"/>
+            <a:ext cx="508473" cy="276999"/>
+          </a:xfrm>
+          <a:prstGeom prst="rect">
+            <a:avLst/>
+          </a:prstGeom>
+          <a:noFill/>
+        </p:spPr>
+        <p:txBody>
+          <a:bodyPr wrap="none" rtlCol="0">
+            <a:spAutoFit/>
+          </a:bodyPr>
+          <a:lstStyle/>
+          <a:p>
+            <a:r>
+              <a:rPr lang="en-US" altLang="ja-JP" sz="1200" dirty="0">
+                <a:solidFill>
+                  <a:schemeClr val="bg1"/>
+                </a:solidFill>
+              </a:rPr>
+              <a:t>5:LB</a:t>
+            </a:r>
+            <a:endParaRPr kumimoji="1" lang="ja-JP" altLang="en-US" sz="1200" dirty="0">
+              <a:solidFill>
+                <a:schemeClr val="bg1"/>
+              </a:solidFill>
+            </a:endParaRPr>
+          </a:p>
+        </p:txBody>
+      </p:sp>
+      <p:sp>
+        <p:nvSpPr>
+          <p:cNvPr id="42" name="フローチャート: 結合子 41">
+            <a:extLst>
+              <a:ext uri="{FF2B5EF4-FFF2-40B4-BE49-F238E27FC236}">
+                <a16:creationId xmlns:a16="http://schemas.microsoft.com/office/drawing/2014/main" id="{F97ACEF0-9EAA-3EF9-4AF5-4539AACB911D}"/>
+              </a:ext>
+            </a:extLst>
+          </p:cNvPr>
+          <p:cNvSpPr/>
+          <p:nvPr/>
+        </p:nvSpPr>
+        <p:spPr>
+          <a:xfrm>
+            <a:off x="6796030" y="1776449"/>
+            <a:ext cx="457200" cy="457200"/>
+          </a:xfrm>
+          <a:prstGeom prst="flowChartConnector">
+            <a:avLst/>
+          </a:prstGeom>
+        </p:spPr>
+        <p:style>
+          <a:lnRef idx="3">
+            <a:schemeClr val="lt1"/>
+          </a:lnRef>
+          <a:fillRef idx="1">
+            <a:schemeClr val="accent5"/>
+          </a:fillRef>
+          <a:effectRef idx="1">
+            <a:schemeClr val="accent5"/>
+          </a:effectRef>
+          <a:fontRef idx="minor">
+            <a:schemeClr val="lt1"/>
+          </a:fontRef>
+        </p:style>
+        <p:txBody>
+          <a:bodyPr rtlCol="0" anchor="ctr"/>
+          <a:lstStyle/>
+          <a:p>
+            <a:pPr algn="ctr"/>
+            <a:r>
+              <a:rPr kumimoji="1" lang="en-US" altLang="ja-JP" sz="1200" dirty="0"/>
+              <a:t>4</a:t>
+            </a:r>
+            <a:endParaRPr kumimoji="1" lang="ja-JP" altLang="en-US" sz="1200" dirty="0"/>
+          </a:p>
+        </p:txBody>
+      </p:sp>
+      <p:sp>
+        <p:nvSpPr>
+          <p:cNvPr id="44" name="フローチャート: 結合子 43">
+            <a:extLst>
+              <a:ext uri="{FF2B5EF4-FFF2-40B4-BE49-F238E27FC236}">
+                <a16:creationId xmlns:a16="http://schemas.microsoft.com/office/drawing/2014/main" id="{52ED281B-A7F0-9017-0772-DB50DA1A04DE}"/>
+              </a:ext>
+            </a:extLst>
+          </p:cNvPr>
+          <p:cNvSpPr/>
+          <p:nvPr/>
+        </p:nvSpPr>
+        <p:spPr>
+          <a:xfrm>
+            <a:off x="10856799" y="1940032"/>
+            <a:ext cx="457200" cy="457200"/>
+          </a:xfrm>
+          <a:prstGeom prst="flowChartConnector">
+            <a:avLst/>
+          </a:prstGeom>
+        </p:spPr>
+        <p:style>
+          <a:lnRef idx="3">
+            <a:schemeClr val="lt1"/>
+          </a:lnRef>
+          <a:fillRef idx="1">
+            <a:schemeClr val="accent5"/>
+          </a:fillRef>
+          <a:effectRef idx="1">
+            <a:schemeClr val="accent5"/>
+          </a:effectRef>
+          <a:fontRef idx="minor">
+            <a:schemeClr val="lt1"/>
+          </a:fontRef>
+        </p:style>
+        <p:txBody>
+          <a:bodyPr rtlCol="0" anchor="ctr"/>
+          <a:lstStyle/>
+          <a:p>
+            <a:pPr algn="ctr"/>
+            <a:r>
+              <a:rPr lang="en-US" altLang="ja-JP" sz="1200" dirty="0"/>
+              <a:t>5</a:t>
+            </a:r>
+            <a:endParaRPr kumimoji="1" lang="ja-JP" altLang="en-US" sz="1200" dirty="0"/>
+          </a:p>
+        </p:txBody>
+      </p:sp>
+      <p:sp>
+        <p:nvSpPr>
+          <p:cNvPr id="46" name="テキスト ボックス 45">
+            <a:extLst>
+              <a:ext uri="{FF2B5EF4-FFF2-40B4-BE49-F238E27FC236}">
+                <a16:creationId xmlns:a16="http://schemas.microsoft.com/office/drawing/2014/main" id="{A9E31B4B-DF72-F6D5-4D24-2DA03DCA13E9}"/>
+              </a:ext>
+            </a:extLst>
+          </p:cNvPr>
+          <p:cNvSpPr txBox="1"/>
+          <p:nvPr/>
+        </p:nvSpPr>
+        <p:spPr>
+          <a:xfrm>
+            <a:off x="11313999" y="1961375"/>
+            <a:ext cx="519694" cy="276999"/>
+          </a:xfrm>
+          <a:prstGeom prst="rect">
+            <a:avLst/>
+          </a:prstGeom>
+          <a:noFill/>
+        </p:spPr>
+        <p:txBody>
+          <a:bodyPr wrap="none" rtlCol="0">
+            <a:spAutoFit/>
+          </a:bodyPr>
+          <a:lstStyle/>
+          <a:p>
+            <a:r>
+              <a:rPr lang="en-US" altLang="ja-JP" sz="1200" dirty="0">
+                <a:solidFill>
+                  <a:schemeClr val="bg1"/>
+                </a:solidFill>
+              </a:rPr>
+              <a:t>8:RB</a:t>
+            </a:r>
+            <a:endParaRPr kumimoji="1" lang="ja-JP" altLang="en-US" sz="1200" dirty="0">
+              <a:solidFill>
+                <a:schemeClr val="bg1"/>
+              </a:solidFill>
+            </a:endParaRPr>
+          </a:p>
+        </p:txBody>
+      </p:sp>
+      <p:sp>
+        <p:nvSpPr>
+          <p:cNvPr id="48" name="テキスト ボックス 47">
+            <a:extLst>
+              <a:ext uri="{FF2B5EF4-FFF2-40B4-BE49-F238E27FC236}">
+                <a16:creationId xmlns:a16="http://schemas.microsoft.com/office/drawing/2014/main" id="{0B9866FA-5D06-6D04-FE20-357ACC4A0C1A}"/>
+              </a:ext>
+            </a:extLst>
+          </p:cNvPr>
+          <p:cNvSpPr txBox="1"/>
+          <p:nvPr/>
+        </p:nvSpPr>
+        <p:spPr>
+          <a:xfrm>
+            <a:off x="8487694" y="977317"/>
+            <a:ext cx="966931" cy="646331"/>
+          </a:xfrm>
+          <a:prstGeom prst="rect">
+            <a:avLst/>
+          </a:prstGeom>
+          <a:noFill/>
+        </p:spPr>
+        <p:txBody>
+          <a:bodyPr wrap="none" rtlCol="0">
+            <a:spAutoFit/>
+          </a:bodyPr>
+          <a:lstStyle/>
+          <a:p>
+            <a:r>
+              <a:rPr kumimoji="1" lang="en-US" altLang="ja-JP" sz="1200" dirty="0">
+                <a:solidFill>
+                  <a:schemeClr val="bg1"/>
+                </a:solidFill>
+              </a:rPr>
+              <a:t>ELECOM</a:t>
+            </a:r>
+          </a:p>
+          <a:p>
+            <a:r>
+              <a:rPr lang="en-US" altLang="ja-JP" sz="1200" dirty="0">
+                <a:solidFill>
+                  <a:schemeClr val="bg1"/>
+                </a:solidFill>
+              </a:rPr>
+              <a:t>JC-U4113S</a:t>
+            </a:r>
+          </a:p>
+          <a:p>
+            <a:r>
+              <a:rPr kumimoji="1" lang="en-US" altLang="ja-JP" sz="1200" dirty="0">
+                <a:solidFill>
+                  <a:schemeClr val="bg1"/>
+                </a:solidFill>
+              </a:rPr>
+              <a:t>X-mode</a:t>
+            </a:r>
+            <a:endParaRPr kumimoji="1" lang="ja-JP" altLang="en-US" sz="1200" dirty="0">
+              <a:solidFill>
+                <a:schemeClr val="bg1"/>
+              </a:solidFill>
+            </a:endParaRPr>
+          </a:p>
+        </p:txBody>
+      </p:sp>
+      <p:sp>
+        <p:nvSpPr>
+          <p:cNvPr id="49" name="フローチャート: 結合子 48">
+            <a:extLst>
+              <a:ext uri="{FF2B5EF4-FFF2-40B4-BE49-F238E27FC236}">
+                <a16:creationId xmlns:a16="http://schemas.microsoft.com/office/drawing/2014/main" id="{6242B464-E943-0D20-8340-F9E3BE326751}"/>
+              </a:ext>
+            </a:extLst>
+          </p:cNvPr>
+          <p:cNvSpPr/>
+          <p:nvPr/>
+        </p:nvSpPr>
+        <p:spPr>
+          <a:xfrm>
+            <a:off x="8866909" y="2096654"/>
+            <a:ext cx="1044129" cy="304588"/>
+          </a:xfrm>
+          <a:prstGeom prst="flowChartConnector">
+            <a:avLst/>
+          </a:prstGeom>
+          <a:noFill/>
+          <a:ln>
+            <a:solidFill>
+              <a:srgbClr val="C00000"/>
+            </a:solidFill>
+          </a:ln>
+        </p:spPr>
+        <p:style>
+          <a:lnRef idx="2">
+            <a:schemeClr val="dk1"/>
+          </a:lnRef>
+          <a:fillRef idx="1">
+            <a:schemeClr val="lt1"/>
+          </a:fillRef>
+          <a:effectRef idx="0">
+            <a:schemeClr val="dk1"/>
+          </a:effectRef>
+          <a:fontRef idx="minor">
+            <a:schemeClr val="dk1"/>
+          </a:fontRef>
+        </p:style>
+        <p:txBody>
+          <a:bodyPr rtlCol="0" anchor="ctr"/>
+          <a:lstStyle/>
+          <a:p>
+            <a:pPr algn="ctr"/>
+            <a:r>
+              <a:rPr kumimoji="1" lang="en-US" altLang="ja-JP" sz="900" dirty="0">
+                <a:solidFill>
+                  <a:srgbClr val="FF0000"/>
+                </a:solidFill>
+              </a:rPr>
+              <a:t>X</a:t>
+            </a:r>
+            <a:r>
+              <a:rPr kumimoji="1" lang="ja-JP" altLang="en-US" sz="900" dirty="0">
+                <a:solidFill>
+                  <a:srgbClr val="FF0000"/>
+                </a:solidFill>
+              </a:rPr>
+              <a:t>固定</a:t>
+            </a:r>
+          </a:p>
+        </p:txBody>
+      </p:sp>
+      <p:sp>
+        <p:nvSpPr>
+          <p:cNvPr id="51" name="テキスト ボックス 50">
+            <a:extLst>
+              <a:ext uri="{FF2B5EF4-FFF2-40B4-BE49-F238E27FC236}">
+                <a16:creationId xmlns:a16="http://schemas.microsoft.com/office/drawing/2014/main" id="{E869DC2C-A7D2-4E03-C85F-F1AF4DFFFABF}"/>
+              </a:ext>
+            </a:extLst>
+          </p:cNvPr>
+          <p:cNvSpPr txBox="1"/>
+          <p:nvPr/>
+        </p:nvSpPr>
+        <p:spPr>
+          <a:xfrm>
+            <a:off x="2787857" y="3022225"/>
+            <a:ext cx="705642" cy="230832"/>
+          </a:xfrm>
+          <a:prstGeom prst="rect">
+            <a:avLst/>
+          </a:prstGeom>
+          <a:noFill/>
+        </p:spPr>
+        <p:txBody>
+          <a:bodyPr wrap="none" rtlCol="0">
+            <a:spAutoFit/>
+          </a:bodyPr>
+          <a:lstStyle/>
+          <a:p>
+            <a:r>
+              <a:rPr lang="en-US" altLang="ja-JP" sz="900" dirty="0">
+                <a:solidFill>
+                  <a:schemeClr val="bg1"/>
+                </a:solidFill>
+              </a:rPr>
+              <a:t>13:GUIDE</a:t>
+            </a:r>
+            <a:endParaRPr kumimoji="1" lang="ja-JP" altLang="en-US" sz="900" dirty="0">
+              <a:solidFill>
+                <a:schemeClr val="bg1"/>
+              </a:solidFill>
+            </a:endParaRPr>
+          </a:p>
+        </p:txBody>
+      </p:sp>
+      <p:sp>
+        <p:nvSpPr>
+          <p:cNvPr id="53" name="テキスト ボックス 52">
+            <a:extLst>
+              <a:ext uri="{FF2B5EF4-FFF2-40B4-BE49-F238E27FC236}">
+                <a16:creationId xmlns:a16="http://schemas.microsoft.com/office/drawing/2014/main" id="{193A471B-54CD-07B4-9D04-3CF32FB8CB6F}"/>
+              </a:ext>
+            </a:extLst>
+          </p:cNvPr>
+          <p:cNvSpPr txBox="1"/>
+          <p:nvPr/>
+        </p:nvSpPr>
+        <p:spPr>
+          <a:xfrm>
+            <a:off x="2330657" y="732213"/>
+            <a:ext cx="497252" cy="230832"/>
+          </a:xfrm>
+          <a:prstGeom prst="rect">
+            <a:avLst/>
+          </a:prstGeom>
+          <a:noFill/>
+        </p:spPr>
+        <p:txBody>
+          <a:bodyPr wrap="none" rtlCol="0">
+            <a:spAutoFit/>
+          </a:bodyPr>
+          <a:lstStyle/>
+          <a:p>
+            <a:r>
+              <a:rPr kumimoji="1" lang="en-US" altLang="ja-JP" sz="900" dirty="0">
+                <a:solidFill>
+                  <a:schemeClr val="bg1"/>
+                </a:solidFill>
+              </a:rPr>
+              <a:t>BACK</a:t>
+            </a:r>
+            <a:endParaRPr kumimoji="1" lang="ja-JP" altLang="en-US" sz="900" dirty="0">
+              <a:solidFill>
+                <a:schemeClr val="bg1"/>
+              </a:solidFill>
+            </a:endParaRPr>
+          </a:p>
+        </p:txBody>
+      </p:sp>
+      <p:sp>
+        <p:nvSpPr>
+          <p:cNvPr id="55" name="テキスト ボックス 54">
+            <a:extLst>
+              <a:ext uri="{FF2B5EF4-FFF2-40B4-BE49-F238E27FC236}">
+                <a16:creationId xmlns:a16="http://schemas.microsoft.com/office/drawing/2014/main" id="{241EF810-1634-773A-027B-F38FF23D5981}"/>
+              </a:ext>
+            </a:extLst>
+          </p:cNvPr>
+          <p:cNvSpPr txBox="1"/>
+          <p:nvPr/>
+        </p:nvSpPr>
+        <p:spPr>
+          <a:xfrm>
+            <a:off x="3366322" y="721287"/>
+            <a:ext cx="553357" cy="230832"/>
+          </a:xfrm>
+          <a:prstGeom prst="rect">
+            <a:avLst/>
+          </a:prstGeom>
+          <a:noFill/>
+        </p:spPr>
+        <p:txBody>
+          <a:bodyPr wrap="none" rtlCol="0">
+            <a:spAutoFit/>
+          </a:bodyPr>
+          <a:lstStyle/>
+          <a:p>
+            <a:r>
+              <a:rPr lang="en-US" altLang="ja-JP" sz="900" dirty="0">
+                <a:solidFill>
+                  <a:schemeClr val="bg1"/>
+                </a:solidFill>
+              </a:rPr>
+              <a:t>START</a:t>
+            </a:r>
+            <a:endParaRPr kumimoji="1" lang="ja-JP" altLang="en-US" sz="900" dirty="0">
+              <a:solidFill>
+                <a:schemeClr val="bg1"/>
+              </a:solidFill>
+            </a:endParaRPr>
+          </a:p>
+        </p:txBody>
+      </p:sp>
+      <p:sp>
+        <p:nvSpPr>
+          <p:cNvPr id="57" name="テキスト ボックス 56">
+            <a:extLst>
+              <a:ext uri="{FF2B5EF4-FFF2-40B4-BE49-F238E27FC236}">
+                <a16:creationId xmlns:a16="http://schemas.microsoft.com/office/drawing/2014/main" id="{D8F9C586-2B8C-6492-D567-AFFC2AB85C77}"/>
+              </a:ext>
+            </a:extLst>
+          </p:cNvPr>
+          <p:cNvSpPr txBox="1"/>
+          <p:nvPr/>
+        </p:nvSpPr>
+        <p:spPr>
+          <a:xfrm>
+            <a:off x="4934918" y="976797"/>
+            <a:ext cx="308098" cy="307777"/>
+          </a:xfrm>
+          <a:prstGeom prst="rect">
+            <a:avLst/>
+          </a:prstGeom>
+          <a:noFill/>
+        </p:spPr>
+        <p:txBody>
+          <a:bodyPr wrap="none" rtlCol="0">
+            <a:spAutoFit/>
+          </a:bodyPr>
+          <a:lstStyle/>
+          <a:p>
+            <a:r>
+              <a:rPr lang="en-US" altLang="ja-JP" sz="1400" b="1" dirty="0"/>
+              <a:t>Y</a:t>
+            </a:r>
+            <a:endParaRPr kumimoji="1" lang="ja-JP" altLang="en-US" sz="1400" b="1" dirty="0"/>
+          </a:p>
+        </p:txBody>
+      </p:sp>
+      <p:sp>
+        <p:nvSpPr>
+          <p:cNvPr id="59" name="テキスト ボックス 58">
+            <a:extLst>
+              <a:ext uri="{FF2B5EF4-FFF2-40B4-BE49-F238E27FC236}">
+                <a16:creationId xmlns:a16="http://schemas.microsoft.com/office/drawing/2014/main" id="{BC2B9AA9-E6F0-73FB-26ED-EEE521322C22}"/>
+              </a:ext>
+            </a:extLst>
+          </p:cNvPr>
+          <p:cNvSpPr txBox="1"/>
+          <p:nvPr/>
+        </p:nvSpPr>
+        <p:spPr>
+          <a:xfrm>
+            <a:off x="4052811" y="1141490"/>
+            <a:ext cx="308098" cy="307777"/>
+          </a:xfrm>
+          <a:prstGeom prst="rect">
+            <a:avLst/>
+          </a:prstGeom>
+          <a:noFill/>
+        </p:spPr>
+        <p:txBody>
+          <a:bodyPr wrap="none" rtlCol="0">
+            <a:spAutoFit/>
+          </a:bodyPr>
+          <a:lstStyle/>
+          <a:p>
+            <a:r>
+              <a:rPr kumimoji="1" lang="en-US" altLang="ja-JP" sz="1400" b="1" dirty="0"/>
+              <a:t>X</a:t>
+            </a:r>
+            <a:endParaRPr kumimoji="1" lang="ja-JP" altLang="en-US" sz="1400" b="1" dirty="0"/>
+          </a:p>
+        </p:txBody>
+      </p:sp>
+      <p:sp>
+        <p:nvSpPr>
+          <p:cNvPr id="61" name="テキスト ボックス 60">
+            <a:extLst>
+              <a:ext uri="{FF2B5EF4-FFF2-40B4-BE49-F238E27FC236}">
+                <a16:creationId xmlns:a16="http://schemas.microsoft.com/office/drawing/2014/main" id="{677DB051-A46C-341D-1265-0695A564B04D}"/>
+              </a:ext>
+            </a:extLst>
+          </p:cNvPr>
+          <p:cNvSpPr txBox="1"/>
+          <p:nvPr/>
+        </p:nvSpPr>
+        <p:spPr>
+          <a:xfrm>
+            <a:off x="5043668" y="2214683"/>
+            <a:ext cx="308098" cy="307777"/>
+          </a:xfrm>
+          <a:prstGeom prst="rect">
+            <a:avLst/>
+          </a:prstGeom>
+          <a:noFill/>
+        </p:spPr>
+        <p:txBody>
+          <a:bodyPr wrap="none" rtlCol="0">
+            <a:spAutoFit/>
+          </a:bodyPr>
+          <a:lstStyle/>
+          <a:p>
+            <a:r>
+              <a:rPr lang="en-US" altLang="ja-JP" sz="1400" b="1" dirty="0"/>
+              <a:t>A</a:t>
+            </a:r>
+            <a:endParaRPr kumimoji="1" lang="ja-JP" altLang="en-US" sz="1400" b="1" dirty="0"/>
+          </a:p>
+        </p:txBody>
+      </p:sp>
+      <p:sp>
+        <p:nvSpPr>
+          <p:cNvPr id="63" name="テキスト ボックス 62">
+            <a:extLst>
+              <a:ext uri="{FF2B5EF4-FFF2-40B4-BE49-F238E27FC236}">
+                <a16:creationId xmlns:a16="http://schemas.microsoft.com/office/drawing/2014/main" id="{76E59B4D-DCE0-DBA1-8C8E-2F408E67BF50}"/>
+              </a:ext>
+            </a:extLst>
+          </p:cNvPr>
+          <p:cNvSpPr txBox="1"/>
+          <p:nvPr/>
+        </p:nvSpPr>
+        <p:spPr>
+          <a:xfrm>
+            <a:off x="5251419" y="1204986"/>
+            <a:ext cx="311304" cy="307777"/>
+          </a:xfrm>
+          <a:prstGeom prst="rect">
+            <a:avLst/>
+          </a:prstGeom>
+          <a:noFill/>
+        </p:spPr>
+        <p:txBody>
+          <a:bodyPr wrap="none" rtlCol="0">
+            <a:spAutoFit/>
+          </a:bodyPr>
+          <a:lstStyle/>
+          <a:p>
+            <a:r>
+              <a:rPr kumimoji="1" lang="en-US" altLang="ja-JP" sz="1400" b="1" dirty="0"/>
+              <a:t>B</a:t>
+            </a:r>
+            <a:endParaRPr kumimoji="1" lang="ja-JP" altLang="en-US" sz="1400" b="1" dirty="0"/>
+          </a:p>
+        </p:txBody>
+      </p:sp>
+      <p:sp>
+        <p:nvSpPr>
+          <p:cNvPr id="64" name="フローチャート: 結合子 63">
+            <a:extLst>
+              <a:ext uri="{FF2B5EF4-FFF2-40B4-BE49-F238E27FC236}">
+                <a16:creationId xmlns:a16="http://schemas.microsoft.com/office/drawing/2014/main" id="{C12D0161-EBCC-9F2E-9624-F239FFADA0A5}"/>
+              </a:ext>
+            </a:extLst>
+          </p:cNvPr>
+          <p:cNvSpPr/>
+          <p:nvPr/>
+        </p:nvSpPr>
+        <p:spPr>
+          <a:xfrm>
+            <a:off x="969818" y="1318987"/>
+            <a:ext cx="786830" cy="642388"/>
+          </a:xfrm>
+          <a:prstGeom prst="flowChartConnector">
+            <a:avLst/>
+          </a:prstGeom>
+          <a:solidFill>
+            <a:schemeClr val="dk1">
+              <a:alpha val="50000"/>
+            </a:schemeClr>
+          </a:solidFill>
+          <a:ln>
+            <a:noFill/>
+          </a:ln>
+        </p:spPr>
+        <p:style>
+          <a:lnRef idx="0">
+            <a:scrgbClr r="0" g="0" b="0"/>
+          </a:lnRef>
+          <a:fillRef idx="0">
+            <a:scrgbClr r="0" g="0" b="0"/>
+          </a:fillRef>
+          <a:effectRef idx="0">
+            <a:scrgbClr r="0" g="0" b="0"/>
+          </a:effectRef>
+          <a:fontRef idx="minor">
+            <a:schemeClr val="lt1"/>
+          </a:fontRef>
+        </p:style>
+        <p:txBody>
+          <a:bodyPr rtlCol="0" anchor="ctr"/>
+          <a:lstStyle/>
+          <a:p>
+            <a:pPr algn="ctr"/>
+            <a:r>
+              <a:rPr lang="ja-JP" altLang="en-US" sz="1200" dirty="0"/>
+              <a:t>使用</a:t>
+            </a:r>
+            <a:endParaRPr lang="en-US" altLang="ja-JP" sz="1200" dirty="0"/>
+          </a:p>
+          <a:p>
+            <a:pPr algn="ctr"/>
+            <a:r>
+              <a:rPr lang="ja-JP" altLang="en-US" sz="1200" dirty="0"/>
+              <a:t>不可</a:t>
+            </a:r>
+            <a:endParaRPr kumimoji="1" lang="ja-JP" altLang="en-US" sz="1200" dirty="0"/>
+          </a:p>
+        </p:txBody>
+      </p:sp>
+      <p:sp>
+        <p:nvSpPr>
+          <p:cNvPr id="66" name="フローチャート: 結合子 65">
+            <a:extLst>
+              <a:ext uri="{FF2B5EF4-FFF2-40B4-BE49-F238E27FC236}">
+                <a16:creationId xmlns:a16="http://schemas.microsoft.com/office/drawing/2014/main" id="{A10D6FE1-63B1-9F2C-9329-29D0FD6189F5}"/>
+              </a:ext>
+            </a:extLst>
+          </p:cNvPr>
+          <p:cNvSpPr/>
+          <p:nvPr/>
+        </p:nvSpPr>
+        <p:spPr>
+          <a:xfrm>
+            <a:off x="6171874" y="2375078"/>
+            <a:ext cx="1044129" cy="488196"/>
+          </a:xfrm>
+          <a:prstGeom prst="flowChartConnector">
+            <a:avLst/>
+          </a:prstGeom>
+          <a:solidFill>
+            <a:schemeClr val="dk1">
+              <a:alpha val="50000"/>
+            </a:schemeClr>
+          </a:solidFill>
+          <a:ln>
+            <a:noFill/>
+          </a:ln>
+        </p:spPr>
+        <p:style>
+          <a:lnRef idx="0">
+            <a:scrgbClr r="0" g="0" b="0"/>
+          </a:lnRef>
+          <a:fillRef idx="0">
+            <a:scrgbClr r="0" g="0" b="0"/>
+          </a:fillRef>
+          <a:effectRef idx="0">
+            <a:scrgbClr r="0" g="0" b="0"/>
+          </a:effectRef>
+          <a:fontRef idx="minor">
+            <a:schemeClr val="lt1"/>
+          </a:fontRef>
+        </p:style>
+        <p:txBody>
+          <a:bodyPr rtlCol="0" anchor="ctr"/>
+          <a:lstStyle/>
+          <a:p>
+            <a:pPr algn="ctr"/>
+            <a:r>
+              <a:rPr lang="ja-JP" altLang="en-US" sz="1050" dirty="0"/>
+              <a:t>使用不可</a:t>
+            </a:r>
+            <a:endParaRPr kumimoji="1" lang="ja-JP" altLang="en-US" sz="1050" dirty="0"/>
+          </a:p>
+        </p:txBody>
+      </p:sp>
+      <p:sp>
+        <p:nvSpPr>
+          <p:cNvPr id="68" name="フローチャート: 結合子 67">
+            <a:extLst>
+              <a:ext uri="{FF2B5EF4-FFF2-40B4-BE49-F238E27FC236}">
+                <a16:creationId xmlns:a16="http://schemas.microsoft.com/office/drawing/2014/main" id="{7926FD15-6A53-F577-4AB6-AE7D411EB6AC}"/>
+              </a:ext>
+            </a:extLst>
+          </p:cNvPr>
+          <p:cNvSpPr/>
+          <p:nvPr/>
+        </p:nvSpPr>
+        <p:spPr>
+          <a:xfrm>
+            <a:off x="10822267" y="2454304"/>
+            <a:ext cx="1044129" cy="488196"/>
+          </a:xfrm>
+          <a:prstGeom prst="flowChartConnector">
+            <a:avLst/>
+          </a:prstGeom>
+          <a:solidFill>
+            <a:schemeClr val="dk1">
+              <a:alpha val="50000"/>
+            </a:schemeClr>
+          </a:solidFill>
+          <a:ln>
+            <a:noFill/>
+          </a:ln>
+        </p:spPr>
+        <p:style>
+          <a:lnRef idx="0">
+            <a:scrgbClr r="0" g="0" b="0"/>
+          </a:lnRef>
+          <a:fillRef idx="0">
+            <a:scrgbClr r="0" g="0" b="0"/>
+          </a:fillRef>
+          <a:effectRef idx="0">
+            <a:scrgbClr r="0" g="0" b="0"/>
+          </a:effectRef>
+          <a:fontRef idx="minor">
+            <a:schemeClr val="lt1"/>
+          </a:fontRef>
+        </p:style>
+        <p:txBody>
+          <a:bodyPr rtlCol="0" anchor="ctr"/>
+          <a:lstStyle/>
+          <a:p>
+            <a:pPr algn="ctr"/>
+            <a:r>
+              <a:rPr lang="ja-JP" altLang="en-US" sz="1050" dirty="0"/>
+              <a:t>使用不可</a:t>
+            </a:r>
+            <a:endParaRPr kumimoji="1" lang="ja-JP" altLang="en-US" sz="1050" dirty="0"/>
+          </a:p>
+        </p:txBody>
+      </p:sp>
+    </p:spTree>
+    <p:extLst>
+      <p:ext uri="{BB962C8B-B14F-4D97-AF65-F5344CB8AC3E}">
+        <p14:creationId xmlns:p14="http://schemas.microsoft.com/office/powerpoint/2010/main" val="4175020041"/>
+      </p:ext>
+    </p:extLst>
+  </p:cSld>
+  <p:clrMapOvr>
+    <a:masterClrMapping/>
+  </p:clrMapOvr>
+</p:sld>
+</file>
+
+<file path=ppt/slides/slide4.xml><?xml version="1.0" encoding="utf-8"?>
+<p:sld xmlns:a="http://schemas.openxmlformats.org/drawingml/2006/main" xmlns:r="http://schemas.openxmlformats.org/officeDocument/2006/relationships" xmlns:p="http://schemas.openxmlformats.org/presentationml/2006/main">
+  <p:cSld>
+    <p:spTree>
+      <p:nvGrpSpPr>
+        <p:cNvPr id="1" name=""/>
+        <p:cNvGrpSpPr/>
+        <p:nvPr/>
+      </p:nvGrpSpPr>
+      <p:grpSpPr>
+        <a:xfrm>
+          <a:off x="0" y="0"/>
+          <a:ext cx="0" cy="0"/>
+          <a:chOff x="0" y="0"/>
+          <a:chExt cx="0" cy="0"/>
+        </a:xfrm>
+      </p:grpSpPr>
+      <p:pic>
+        <p:nvPicPr>
+          <p:cNvPr id="3" name="図 2">
+            <a:extLst>
+              <a:ext uri="{FF2B5EF4-FFF2-40B4-BE49-F238E27FC236}">
+                <a16:creationId xmlns:a16="http://schemas.microsoft.com/office/drawing/2014/main" id="{C5F0A406-C7FD-37C9-9B4E-F8F966EE2560}"/>
+              </a:ext>
+            </a:extLst>
+          </p:cNvPr>
+          <p:cNvPicPr>
+            <a:picLocks noChangeAspect="1"/>
+          </p:cNvPicPr>
+          <p:nvPr/>
+        </p:nvPicPr>
+        <p:blipFill>
+          <a:blip r:embed="rId2"/>
+          <a:stretch>
+            <a:fillRect/>
+          </a:stretch>
+        </p:blipFill>
+        <p:spPr>
+          <a:xfrm>
+            <a:off x="157018" y="574998"/>
+            <a:ext cx="5872390" cy="4005809"/>
+          </a:xfrm>
+          <a:prstGeom prst="rect">
+            <a:avLst/>
+          </a:prstGeom>
+        </p:spPr>
+      </p:pic>
+      <p:sp>
+        <p:nvSpPr>
+          <p:cNvPr id="5" name="矢印: 左右 4">
+            <a:extLst>
+              <a:ext uri="{FF2B5EF4-FFF2-40B4-BE49-F238E27FC236}">
+                <a16:creationId xmlns:a16="http://schemas.microsoft.com/office/drawing/2014/main" id="{BBC062B3-FFF1-9184-BE37-7A40AA8E444C}"/>
+              </a:ext>
+            </a:extLst>
+          </p:cNvPr>
+          <p:cNvSpPr/>
+          <p:nvPr/>
+        </p:nvSpPr>
+        <p:spPr>
+          <a:xfrm>
+            <a:off x="1560945" y="2863274"/>
+            <a:ext cx="1216152" cy="484632"/>
+          </a:xfrm>
+          <a:prstGeom prst="leftRightArrow">
+            <a:avLst/>
+          </a:prstGeom>
+        </p:spPr>
+        <p:style>
+          <a:lnRef idx="3">
+            <a:schemeClr val="lt1"/>
+          </a:lnRef>
+          <a:fillRef idx="1">
+            <a:schemeClr val="accent2"/>
+          </a:fillRef>
+          <a:effectRef idx="1">
+            <a:schemeClr val="accent2"/>
+          </a:effectRef>
+          <a:fontRef idx="minor">
+            <a:schemeClr val="lt1"/>
+          </a:fontRef>
+        </p:style>
+        <p:txBody>
+          <a:bodyPr rtlCol="0" anchor="ctr"/>
+          <a:lstStyle/>
+          <a:p>
+            <a:pPr algn="ctr"/>
+            <a:r>
+              <a:rPr kumimoji="1" lang="en-US" altLang="ja-JP" sz="900" dirty="0"/>
+              <a:t>-1      [0]     +1</a:t>
+            </a:r>
+            <a:endParaRPr kumimoji="1" lang="ja-JP" altLang="en-US" sz="900" dirty="0"/>
+          </a:p>
+        </p:txBody>
+      </p:sp>
+      <p:sp>
+        <p:nvSpPr>
+          <p:cNvPr id="7" name="矢印: 上下 6">
+            <a:extLst>
+              <a:ext uri="{FF2B5EF4-FFF2-40B4-BE49-F238E27FC236}">
+                <a16:creationId xmlns:a16="http://schemas.microsoft.com/office/drawing/2014/main" id="{23D7A659-F956-16A7-E984-583042E91875}"/>
+              </a:ext>
+            </a:extLst>
+          </p:cNvPr>
+          <p:cNvSpPr/>
+          <p:nvPr/>
+        </p:nvSpPr>
+        <p:spPr>
+          <a:xfrm>
+            <a:off x="1816191" y="3274016"/>
+            <a:ext cx="705660" cy="1216152"/>
+          </a:xfrm>
+          <a:prstGeom prst="upDownArrow">
+            <a:avLst/>
+          </a:prstGeom>
+        </p:spPr>
+        <p:style>
+          <a:lnRef idx="3">
+            <a:schemeClr val="lt1"/>
+          </a:lnRef>
+          <a:fillRef idx="1">
+            <a:schemeClr val="accent2"/>
+          </a:fillRef>
+          <a:effectRef idx="1">
+            <a:schemeClr val="accent2"/>
+          </a:effectRef>
+          <a:fontRef idx="minor">
+            <a:schemeClr val="lt1"/>
+          </a:fontRef>
+        </p:style>
+        <p:txBody>
+          <a:bodyPr rtlCol="0" anchor="ctr"/>
+          <a:lstStyle/>
+          <a:p>
+            <a:pPr algn="ctr"/>
+            <a:r>
+              <a:rPr kumimoji="1" lang="en-US" altLang="ja-JP" sz="900" dirty="0"/>
+              <a:t>-1</a:t>
+            </a:r>
+          </a:p>
+          <a:p>
+            <a:pPr algn="ctr"/>
+            <a:endParaRPr lang="en-US" altLang="ja-JP" sz="900" dirty="0"/>
+          </a:p>
+          <a:p>
+            <a:pPr algn="ctr"/>
+            <a:endParaRPr lang="en-US" altLang="ja-JP" sz="900" dirty="0"/>
+          </a:p>
+          <a:p>
+            <a:pPr algn="ctr"/>
+            <a:r>
+              <a:rPr kumimoji="1" lang="en-US" altLang="ja-JP" sz="900" dirty="0"/>
+              <a:t>[1]</a:t>
+            </a:r>
+          </a:p>
+          <a:p>
+            <a:pPr algn="ctr"/>
+            <a:endParaRPr lang="en-US" altLang="ja-JP" sz="900" dirty="0"/>
+          </a:p>
+          <a:p>
+            <a:pPr algn="ctr"/>
+            <a:endParaRPr lang="en-US" altLang="ja-JP" sz="900" dirty="0"/>
+          </a:p>
+          <a:p>
+            <a:pPr algn="ctr"/>
+            <a:r>
+              <a:rPr kumimoji="1" lang="en-US" altLang="ja-JP" sz="900" dirty="0"/>
+              <a:t>+1</a:t>
+            </a:r>
+            <a:endParaRPr kumimoji="1" lang="ja-JP" altLang="en-US" sz="900" dirty="0"/>
+          </a:p>
+        </p:txBody>
+      </p:sp>
+      <p:sp>
+        <p:nvSpPr>
+          <p:cNvPr id="9" name="矢印: 左右 8">
+            <a:extLst>
+              <a:ext uri="{FF2B5EF4-FFF2-40B4-BE49-F238E27FC236}">
+                <a16:creationId xmlns:a16="http://schemas.microsoft.com/office/drawing/2014/main" id="{FA1E57DE-C37D-65A3-9479-26DB93374926}"/>
+              </a:ext>
+            </a:extLst>
+          </p:cNvPr>
+          <p:cNvSpPr/>
+          <p:nvPr/>
+        </p:nvSpPr>
+        <p:spPr>
+          <a:xfrm>
+            <a:off x="4191045" y="2897036"/>
+            <a:ext cx="1216152" cy="484632"/>
+          </a:xfrm>
+          <a:prstGeom prst="leftRightArrow">
+            <a:avLst/>
+          </a:prstGeom>
+        </p:spPr>
+        <p:style>
+          <a:lnRef idx="3">
+            <a:schemeClr val="lt1"/>
+          </a:lnRef>
+          <a:fillRef idx="1">
+            <a:schemeClr val="accent2"/>
+          </a:fillRef>
+          <a:effectRef idx="1">
+            <a:schemeClr val="accent2"/>
+          </a:effectRef>
+          <a:fontRef idx="minor">
+            <a:schemeClr val="lt1"/>
+          </a:fontRef>
+        </p:style>
+        <p:txBody>
+          <a:bodyPr rtlCol="0" anchor="ctr"/>
+          <a:lstStyle/>
+          <a:p>
+            <a:pPr algn="ctr"/>
+            <a:r>
+              <a:rPr kumimoji="1" lang="en-US" altLang="ja-JP" sz="900" dirty="0"/>
+              <a:t>-1      [3]     +1</a:t>
+            </a:r>
+            <a:endParaRPr kumimoji="1" lang="ja-JP" altLang="en-US" sz="900" dirty="0"/>
+          </a:p>
+        </p:txBody>
+      </p:sp>
+      <p:sp>
+        <p:nvSpPr>
+          <p:cNvPr id="11" name="矢印: 上下 10">
+            <a:extLst>
+              <a:ext uri="{FF2B5EF4-FFF2-40B4-BE49-F238E27FC236}">
+                <a16:creationId xmlns:a16="http://schemas.microsoft.com/office/drawing/2014/main" id="{DBA25BED-768E-6466-48F7-FE68DB40BD46}"/>
+              </a:ext>
+            </a:extLst>
+          </p:cNvPr>
+          <p:cNvSpPr/>
+          <p:nvPr/>
+        </p:nvSpPr>
+        <p:spPr>
+          <a:xfrm>
+            <a:off x="4446291" y="3275727"/>
+            <a:ext cx="705660" cy="1216152"/>
+          </a:xfrm>
+          <a:prstGeom prst="upDownArrow">
+            <a:avLst/>
+          </a:prstGeom>
+        </p:spPr>
+        <p:style>
+          <a:lnRef idx="3">
+            <a:schemeClr val="lt1"/>
+          </a:lnRef>
+          <a:fillRef idx="1">
+            <a:schemeClr val="accent2"/>
+          </a:fillRef>
+          <a:effectRef idx="1">
+            <a:schemeClr val="accent2"/>
+          </a:effectRef>
+          <a:fontRef idx="minor">
+            <a:schemeClr val="lt1"/>
+          </a:fontRef>
+        </p:style>
+        <p:txBody>
+          <a:bodyPr rtlCol="0" anchor="ctr"/>
+          <a:lstStyle/>
+          <a:p>
+            <a:pPr algn="ctr"/>
+            <a:r>
+              <a:rPr kumimoji="1" lang="en-US" altLang="ja-JP" sz="900" dirty="0"/>
+              <a:t>-1</a:t>
+            </a:r>
+          </a:p>
+          <a:p>
+            <a:pPr algn="ctr"/>
+            <a:endParaRPr lang="en-US" altLang="ja-JP" sz="900" dirty="0"/>
+          </a:p>
+          <a:p>
+            <a:pPr algn="ctr"/>
+            <a:endParaRPr lang="en-US" altLang="ja-JP" sz="900" dirty="0"/>
+          </a:p>
+          <a:p>
+            <a:pPr algn="ctr"/>
+            <a:r>
+              <a:rPr kumimoji="1" lang="en-US" altLang="ja-JP" sz="900" dirty="0"/>
+              <a:t>[4]</a:t>
+            </a:r>
+          </a:p>
+          <a:p>
+            <a:pPr algn="ctr"/>
+            <a:endParaRPr lang="en-US" altLang="ja-JP" sz="900" dirty="0"/>
+          </a:p>
+          <a:p>
+            <a:pPr algn="ctr"/>
+            <a:endParaRPr lang="en-US" altLang="ja-JP" sz="900" dirty="0"/>
+          </a:p>
+          <a:p>
+            <a:pPr algn="ctr"/>
+            <a:r>
+              <a:rPr kumimoji="1" lang="en-US" altLang="ja-JP" sz="900" dirty="0"/>
+              <a:t>+1</a:t>
+            </a:r>
+            <a:endParaRPr kumimoji="1" lang="ja-JP" altLang="en-US" sz="900" dirty="0"/>
+          </a:p>
+        </p:txBody>
+      </p:sp>
+      <p:sp>
+        <p:nvSpPr>
+          <p:cNvPr id="13" name="フローチャート: 結合子 12">
+            <a:extLst>
+              <a:ext uri="{FF2B5EF4-FFF2-40B4-BE49-F238E27FC236}">
+                <a16:creationId xmlns:a16="http://schemas.microsoft.com/office/drawing/2014/main" id="{F026DA75-5C07-6C14-BCD7-9B416691344C}"/>
+              </a:ext>
+            </a:extLst>
+          </p:cNvPr>
+          <p:cNvSpPr/>
+          <p:nvPr/>
+        </p:nvSpPr>
+        <p:spPr>
+          <a:xfrm>
+            <a:off x="1940421" y="2195946"/>
+            <a:ext cx="457200" cy="457200"/>
+          </a:xfrm>
+          <a:prstGeom prst="flowChartConnector">
+            <a:avLst/>
+          </a:prstGeom>
+        </p:spPr>
+        <p:style>
+          <a:lnRef idx="3">
+            <a:schemeClr val="lt1"/>
+          </a:lnRef>
+          <a:fillRef idx="1">
+            <a:schemeClr val="accent5"/>
+          </a:fillRef>
+          <a:effectRef idx="1">
+            <a:schemeClr val="accent5"/>
+          </a:effectRef>
+          <a:fontRef idx="minor">
+            <a:schemeClr val="lt1"/>
+          </a:fontRef>
+        </p:style>
+        <p:txBody>
+          <a:bodyPr rtlCol="0" anchor="ctr"/>
+          <a:lstStyle/>
+          <a:p>
+            <a:pPr algn="ctr"/>
+            <a:r>
+              <a:rPr kumimoji="1" lang="en-US" altLang="ja-JP" sz="1200" dirty="0"/>
+              <a:t>9</a:t>
+            </a:r>
+            <a:endParaRPr kumimoji="1" lang="ja-JP" altLang="en-US" sz="1200" dirty="0"/>
+          </a:p>
+        </p:txBody>
+      </p:sp>
+      <p:sp>
+        <p:nvSpPr>
+          <p:cNvPr id="15" name="フローチャート: 結合子 14">
+            <a:extLst>
+              <a:ext uri="{FF2B5EF4-FFF2-40B4-BE49-F238E27FC236}">
+                <a16:creationId xmlns:a16="http://schemas.microsoft.com/office/drawing/2014/main" id="{6E637C09-B03D-90BF-7F0A-5BFCCE63B2DC}"/>
+              </a:ext>
+            </a:extLst>
+          </p:cNvPr>
+          <p:cNvSpPr/>
+          <p:nvPr/>
+        </p:nvSpPr>
+        <p:spPr>
+          <a:xfrm>
+            <a:off x="3884676" y="2195946"/>
+            <a:ext cx="457200" cy="457200"/>
+          </a:xfrm>
+          <a:prstGeom prst="flowChartConnector">
+            <a:avLst/>
+          </a:prstGeom>
+        </p:spPr>
+        <p:style>
+          <a:lnRef idx="3">
+            <a:schemeClr val="lt1"/>
+          </a:lnRef>
+          <a:fillRef idx="1">
+            <a:schemeClr val="accent5"/>
+          </a:fillRef>
+          <a:effectRef idx="1">
+            <a:schemeClr val="accent5"/>
+          </a:effectRef>
+          <a:fontRef idx="minor">
+            <a:schemeClr val="lt1"/>
+          </a:fontRef>
+        </p:style>
+        <p:txBody>
+          <a:bodyPr rtlCol="0" anchor="ctr"/>
+          <a:lstStyle/>
+          <a:p>
+            <a:pPr algn="ctr"/>
+            <a:r>
+              <a:rPr lang="en-US" altLang="ja-JP" sz="1000" dirty="0"/>
+              <a:t>10</a:t>
+            </a:r>
+            <a:endParaRPr kumimoji="1" lang="ja-JP" altLang="en-US" sz="1000" dirty="0"/>
+          </a:p>
+        </p:txBody>
+      </p:sp>
+      <p:sp>
+        <p:nvSpPr>
+          <p:cNvPr id="17" name="フローチャート: 結合子 16">
+            <a:extLst>
+              <a:ext uri="{FF2B5EF4-FFF2-40B4-BE49-F238E27FC236}">
+                <a16:creationId xmlns:a16="http://schemas.microsoft.com/office/drawing/2014/main" id="{4EB7B1A0-BB96-49B7-825B-C5A1E363E7B5}"/>
+              </a:ext>
+            </a:extLst>
+          </p:cNvPr>
+          <p:cNvSpPr/>
+          <p:nvPr/>
+        </p:nvSpPr>
+        <p:spPr>
+          <a:xfrm>
+            <a:off x="2897124" y="2534029"/>
+            <a:ext cx="457200" cy="457200"/>
+          </a:xfrm>
+          <a:prstGeom prst="flowChartConnector">
+            <a:avLst/>
+          </a:prstGeom>
+        </p:spPr>
+        <p:style>
+          <a:lnRef idx="3">
+            <a:schemeClr val="lt1"/>
+          </a:lnRef>
+          <a:fillRef idx="1">
+            <a:schemeClr val="accent5"/>
+          </a:fillRef>
+          <a:effectRef idx="1">
+            <a:schemeClr val="accent5"/>
+          </a:effectRef>
+          <a:fontRef idx="minor">
+            <a:schemeClr val="lt1"/>
+          </a:fontRef>
+        </p:style>
+        <p:txBody>
+          <a:bodyPr rtlCol="0" anchor="ctr"/>
+          <a:lstStyle/>
+          <a:p>
+            <a:pPr algn="ctr"/>
+            <a:r>
+              <a:rPr lang="en-US" altLang="ja-JP" sz="1200" dirty="0"/>
+              <a:t>8</a:t>
+            </a:r>
+            <a:endParaRPr kumimoji="1" lang="ja-JP" altLang="en-US" sz="1200" dirty="0"/>
+          </a:p>
+        </p:txBody>
+      </p:sp>
+      <p:sp>
+        <p:nvSpPr>
+          <p:cNvPr id="19" name="フローチャート: 結合子 18">
+            <a:extLst>
+              <a:ext uri="{FF2B5EF4-FFF2-40B4-BE49-F238E27FC236}">
+                <a16:creationId xmlns:a16="http://schemas.microsoft.com/office/drawing/2014/main" id="{679934AA-33A7-D10C-CB27-13045A8D4824}"/>
+              </a:ext>
+            </a:extLst>
+          </p:cNvPr>
+          <p:cNvSpPr/>
+          <p:nvPr/>
+        </p:nvSpPr>
+        <p:spPr>
+          <a:xfrm>
+            <a:off x="2330657" y="999991"/>
+            <a:ext cx="457200" cy="457200"/>
+          </a:xfrm>
+          <a:prstGeom prst="flowChartConnector">
+            <a:avLst/>
+          </a:prstGeom>
+        </p:spPr>
+        <p:style>
+          <a:lnRef idx="3">
+            <a:schemeClr val="lt1"/>
+          </a:lnRef>
+          <a:fillRef idx="1">
+            <a:schemeClr val="accent5"/>
+          </a:fillRef>
+          <a:effectRef idx="1">
+            <a:schemeClr val="accent5"/>
+          </a:effectRef>
+          <a:fontRef idx="minor">
+            <a:schemeClr val="lt1"/>
+          </a:fontRef>
+        </p:style>
+        <p:txBody>
+          <a:bodyPr rtlCol="0" anchor="ctr"/>
+          <a:lstStyle/>
+          <a:p>
+            <a:pPr algn="ctr"/>
+            <a:r>
+              <a:rPr kumimoji="1" lang="en-US" altLang="ja-JP" sz="1200" dirty="0"/>
+              <a:t>6</a:t>
+            </a:r>
+            <a:endParaRPr kumimoji="1" lang="ja-JP" altLang="en-US" sz="1200" dirty="0"/>
+          </a:p>
+        </p:txBody>
+      </p:sp>
+      <p:sp>
+        <p:nvSpPr>
+          <p:cNvPr id="21" name="フローチャート: 結合子 20">
+            <a:extLst>
+              <a:ext uri="{FF2B5EF4-FFF2-40B4-BE49-F238E27FC236}">
+                <a16:creationId xmlns:a16="http://schemas.microsoft.com/office/drawing/2014/main" id="{7BBB318C-64C2-4603-2A88-3F3D3DCFF56F}"/>
+              </a:ext>
+            </a:extLst>
+          </p:cNvPr>
+          <p:cNvSpPr/>
+          <p:nvPr/>
+        </p:nvSpPr>
+        <p:spPr>
+          <a:xfrm>
+            <a:off x="3405124" y="999991"/>
+            <a:ext cx="457200" cy="457200"/>
+          </a:xfrm>
+          <a:prstGeom prst="flowChartConnector">
+            <a:avLst/>
+          </a:prstGeom>
+        </p:spPr>
+        <p:style>
+          <a:lnRef idx="3">
+            <a:schemeClr val="lt1"/>
+          </a:lnRef>
+          <a:fillRef idx="1">
+            <a:schemeClr val="accent5"/>
+          </a:fillRef>
+          <a:effectRef idx="1">
+            <a:schemeClr val="accent5"/>
+          </a:effectRef>
+          <a:fontRef idx="minor">
+            <a:schemeClr val="lt1"/>
+          </a:fontRef>
+        </p:style>
+        <p:txBody>
+          <a:bodyPr rtlCol="0" anchor="ctr"/>
+          <a:lstStyle/>
+          <a:p>
+            <a:pPr algn="ctr"/>
+            <a:r>
+              <a:rPr lang="en-US" altLang="ja-JP" sz="1200" dirty="0"/>
+              <a:t>7</a:t>
+            </a:r>
+            <a:endParaRPr kumimoji="1" lang="ja-JP" altLang="en-US" sz="1200" dirty="0"/>
+          </a:p>
+        </p:txBody>
+      </p:sp>
+      <p:sp>
+        <p:nvSpPr>
+          <p:cNvPr id="23" name="フローチャート: 結合子 22">
+            <a:extLst>
+              <a:ext uri="{FF2B5EF4-FFF2-40B4-BE49-F238E27FC236}">
+                <a16:creationId xmlns:a16="http://schemas.microsoft.com/office/drawing/2014/main" id="{6BE0665E-39D2-72D7-169D-48884A2B9C81}"/>
+              </a:ext>
+            </a:extLst>
+          </p:cNvPr>
+          <p:cNvSpPr/>
+          <p:nvPr/>
+        </p:nvSpPr>
+        <p:spPr>
+          <a:xfrm>
+            <a:off x="4039988" y="1389057"/>
+            <a:ext cx="457200" cy="457200"/>
+          </a:xfrm>
+          <a:prstGeom prst="flowChartConnector">
+            <a:avLst/>
+          </a:prstGeom>
+        </p:spPr>
+        <p:style>
+          <a:lnRef idx="3">
+            <a:schemeClr val="lt1"/>
+          </a:lnRef>
+          <a:fillRef idx="1">
+            <a:schemeClr val="accent5"/>
+          </a:fillRef>
+          <a:effectRef idx="1">
+            <a:schemeClr val="accent5"/>
+          </a:effectRef>
+          <a:fontRef idx="minor">
+            <a:schemeClr val="lt1"/>
+          </a:fontRef>
+        </p:style>
+        <p:txBody>
+          <a:bodyPr rtlCol="0" anchor="ctr"/>
+          <a:lstStyle/>
+          <a:p>
+            <a:pPr algn="ctr"/>
+            <a:r>
+              <a:rPr kumimoji="1" lang="en-US" altLang="ja-JP" sz="1200" dirty="0"/>
+              <a:t>2</a:t>
+            </a:r>
+            <a:endParaRPr kumimoji="1" lang="ja-JP" altLang="en-US" sz="1200" dirty="0"/>
+          </a:p>
+        </p:txBody>
+      </p:sp>
+      <p:sp>
+        <p:nvSpPr>
+          <p:cNvPr id="25" name="フローチャート: 結合子 24">
+            <a:extLst>
+              <a:ext uri="{FF2B5EF4-FFF2-40B4-BE49-F238E27FC236}">
+                <a16:creationId xmlns:a16="http://schemas.microsoft.com/office/drawing/2014/main" id="{1051DAF9-F24B-033D-4EF4-05D99E441E1E}"/>
+              </a:ext>
+            </a:extLst>
+          </p:cNvPr>
+          <p:cNvSpPr/>
+          <p:nvPr/>
+        </p:nvSpPr>
+        <p:spPr>
+          <a:xfrm>
+            <a:off x="4607331" y="1997104"/>
+            <a:ext cx="457200" cy="457200"/>
+          </a:xfrm>
+          <a:prstGeom prst="flowChartConnector">
+            <a:avLst/>
+          </a:prstGeom>
+        </p:spPr>
+        <p:style>
+          <a:lnRef idx="3">
+            <a:schemeClr val="lt1"/>
+          </a:lnRef>
+          <a:fillRef idx="1">
+            <a:schemeClr val="accent5"/>
+          </a:fillRef>
+          <a:effectRef idx="1">
+            <a:schemeClr val="accent5"/>
+          </a:effectRef>
+          <a:fontRef idx="minor">
+            <a:schemeClr val="lt1"/>
+          </a:fontRef>
+        </p:style>
+        <p:txBody>
+          <a:bodyPr rtlCol="0" anchor="ctr"/>
+          <a:lstStyle/>
+          <a:p>
+            <a:pPr algn="ctr"/>
+            <a:r>
+              <a:rPr lang="en-US" altLang="ja-JP" sz="1200" dirty="0"/>
+              <a:t>0</a:t>
+            </a:r>
+            <a:endParaRPr kumimoji="1" lang="ja-JP" altLang="en-US" sz="1200" dirty="0"/>
+          </a:p>
+        </p:txBody>
+      </p:sp>
+      <p:sp>
+        <p:nvSpPr>
+          <p:cNvPr id="27" name="フローチャート: 結合子 26">
+            <a:extLst>
+              <a:ext uri="{FF2B5EF4-FFF2-40B4-BE49-F238E27FC236}">
+                <a16:creationId xmlns:a16="http://schemas.microsoft.com/office/drawing/2014/main" id="{D4075E93-F192-C56B-BE8A-F605F58731DE}"/>
+              </a:ext>
+            </a:extLst>
+          </p:cNvPr>
+          <p:cNvSpPr/>
+          <p:nvPr/>
+        </p:nvSpPr>
+        <p:spPr>
+          <a:xfrm>
+            <a:off x="5114455" y="1457191"/>
+            <a:ext cx="457200" cy="457200"/>
+          </a:xfrm>
+          <a:prstGeom prst="flowChartConnector">
+            <a:avLst/>
+          </a:prstGeom>
+        </p:spPr>
+        <p:style>
+          <a:lnRef idx="3">
+            <a:schemeClr val="lt1"/>
+          </a:lnRef>
+          <a:fillRef idx="1">
+            <a:schemeClr val="accent5"/>
+          </a:fillRef>
+          <a:effectRef idx="1">
+            <a:schemeClr val="accent5"/>
+          </a:effectRef>
+          <a:fontRef idx="minor">
+            <a:schemeClr val="lt1"/>
+          </a:fontRef>
+        </p:style>
+        <p:txBody>
+          <a:bodyPr rtlCol="0" anchor="ctr"/>
+          <a:lstStyle/>
+          <a:p>
+            <a:pPr algn="ctr"/>
+            <a:r>
+              <a:rPr kumimoji="1" lang="en-US" altLang="ja-JP" sz="1200" dirty="0"/>
+              <a:t>1</a:t>
+            </a:r>
+            <a:endParaRPr kumimoji="1" lang="ja-JP" altLang="en-US" sz="1200" dirty="0"/>
+          </a:p>
+        </p:txBody>
+      </p:sp>
+      <p:sp>
+        <p:nvSpPr>
+          <p:cNvPr id="29" name="フローチャート: 結合子 28">
+            <a:extLst>
+              <a:ext uri="{FF2B5EF4-FFF2-40B4-BE49-F238E27FC236}">
+                <a16:creationId xmlns:a16="http://schemas.microsoft.com/office/drawing/2014/main" id="{694D5FB2-97A6-AC5B-4D61-871EE2C0D457}"/>
+              </a:ext>
+            </a:extLst>
+          </p:cNvPr>
+          <p:cNvSpPr/>
+          <p:nvPr/>
+        </p:nvSpPr>
+        <p:spPr>
+          <a:xfrm>
+            <a:off x="4530391" y="886893"/>
+            <a:ext cx="457200" cy="457200"/>
+          </a:xfrm>
+          <a:prstGeom prst="flowChartConnector">
+            <a:avLst/>
+          </a:prstGeom>
+        </p:spPr>
+        <p:style>
+          <a:lnRef idx="3">
+            <a:schemeClr val="lt1"/>
+          </a:lnRef>
+          <a:fillRef idx="1">
+            <a:schemeClr val="accent5"/>
+          </a:fillRef>
+          <a:effectRef idx="1">
+            <a:schemeClr val="accent5"/>
+          </a:effectRef>
+          <a:fontRef idx="minor">
+            <a:schemeClr val="lt1"/>
+          </a:fontRef>
+        </p:style>
+        <p:txBody>
+          <a:bodyPr rtlCol="0" anchor="ctr"/>
+          <a:lstStyle/>
+          <a:p>
+            <a:pPr algn="ctr"/>
+            <a:r>
+              <a:rPr lang="en-US" altLang="ja-JP" sz="1200" dirty="0"/>
+              <a:t>3</a:t>
+            </a:r>
+            <a:endParaRPr kumimoji="1" lang="ja-JP" altLang="en-US" sz="1200" dirty="0"/>
+          </a:p>
+        </p:txBody>
+      </p:sp>
+      <p:sp>
+        <p:nvSpPr>
+          <p:cNvPr id="31" name="テキスト ボックス 30">
+            <a:extLst>
+              <a:ext uri="{FF2B5EF4-FFF2-40B4-BE49-F238E27FC236}">
+                <a16:creationId xmlns:a16="http://schemas.microsoft.com/office/drawing/2014/main" id="{33AA3354-8B24-B44E-E227-64BB12580791}"/>
+              </a:ext>
+            </a:extLst>
+          </p:cNvPr>
+          <p:cNvSpPr txBox="1"/>
+          <p:nvPr/>
+        </p:nvSpPr>
+        <p:spPr>
+          <a:xfrm>
+            <a:off x="157018" y="582260"/>
+            <a:ext cx="966931" cy="646331"/>
+          </a:xfrm>
+          <a:prstGeom prst="rect">
+            <a:avLst/>
+          </a:prstGeom>
+          <a:noFill/>
+        </p:spPr>
+        <p:txBody>
+          <a:bodyPr wrap="none" rtlCol="0">
+            <a:spAutoFit/>
+          </a:bodyPr>
+          <a:lstStyle/>
+          <a:p>
+            <a:r>
+              <a:rPr kumimoji="1" lang="en-US" altLang="ja-JP" sz="1200" dirty="0">
+                <a:solidFill>
+                  <a:schemeClr val="bg1"/>
+                </a:solidFill>
+              </a:rPr>
+              <a:t>ELECOM</a:t>
+            </a:r>
+          </a:p>
+          <a:p>
+            <a:r>
+              <a:rPr lang="en-US" altLang="ja-JP" sz="1200" dirty="0">
+                <a:solidFill>
+                  <a:schemeClr val="bg1"/>
+                </a:solidFill>
+              </a:rPr>
+              <a:t>JC-U4113S</a:t>
+            </a:r>
+          </a:p>
+          <a:p>
+            <a:r>
+              <a:rPr kumimoji="1" lang="en-US" altLang="ja-JP" sz="1200" dirty="0">
+                <a:solidFill>
+                  <a:schemeClr val="bg1"/>
+                </a:solidFill>
+              </a:rPr>
+              <a:t>X-mode</a:t>
+            </a:r>
+            <a:endParaRPr kumimoji="1" lang="ja-JP" altLang="en-US" sz="1200" dirty="0">
+              <a:solidFill>
+                <a:schemeClr val="bg1"/>
+              </a:solidFill>
+            </a:endParaRPr>
+          </a:p>
+        </p:txBody>
+      </p:sp>
+      <p:sp>
+        <p:nvSpPr>
+          <p:cNvPr id="33" name="テキスト ボックス 32">
+            <a:extLst>
+              <a:ext uri="{FF2B5EF4-FFF2-40B4-BE49-F238E27FC236}">
+                <a16:creationId xmlns:a16="http://schemas.microsoft.com/office/drawing/2014/main" id="{04D0DB3E-A492-AA81-E555-B0C757EF1CFC}"/>
+              </a:ext>
+            </a:extLst>
+          </p:cNvPr>
+          <p:cNvSpPr txBox="1"/>
+          <p:nvPr/>
+        </p:nvSpPr>
+        <p:spPr>
+          <a:xfrm>
+            <a:off x="2542691" y="2404203"/>
+            <a:ext cx="705642" cy="230832"/>
+          </a:xfrm>
+          <a:prstGeom prst="rect">
+            <a:avLst/>
+          </a:prstGeom>
+          <a:noFill/>
+        </p:spPr>
+        <p:txBody>
+          <a:bodyPr wrap="none" rtlCol="0">
+            <a:spAutoFit/>
+          </a:bodyPr>
+          <a:lstStyle/>
+          <a:p>
+            <a:r>
+              <a:rPr lang="en-US" altLang="ja-JP" sz="900" dirty="0"/>
+              <a:t>13:GUIDE</a:t>
+            </a:r>
+            <a:endParaRPr kumimoji="1" lang="ja-JP" altLang="en-US" sz="900" dirty="0"/>
+          </a:p>
+        </p:txBody>
+      </p:sp>
+      <p:sp>
+        <p:nvSpPr>
+          <p:cNvPr id="35" name="テキスト ボックス 34">
+            <a:extLst>
+              <a:ext uri="{FF2B5EF4-FFF2-40B4-BE49-F238E27FC236}">
+                <a16:creationId xmlns:a16="http://schemas.microsoft.com/office/drawing/2014/main" id="{BC168398-69BD-4E4C-FE60-7EB620F167E8}"/>
+              </a:ext>
+            </a:extLst>
+          </p:cNvPr>
+          <p:cNvSpPr txBox="1"/>
+          <p:nvPr/>
+        </p:nvSpPr>
+        <p:spPr>
+          <a:xfrm>
+            <a:off x="2330657" y="732213"/>
+            <a:ext cx="497252" cy="230832"/>
+          </a:xfrm>
+          <a:prstGeom prst="rect">
+            <a:avLst/>
+          </a:prstGeom>
+          <a:noFill/>
+        </p:spPr>
+        <p:txBody>
+          <a:bodyPr wrap="none" rtlCol="0">
+            <a:spAutoFit/>
+          </a:bodyPr>
+          <a:lstStyle/>
+          <a:p>
+            <a:r>
+              <a:rPr kumimoji="1" lang="en-US" altLang="ja-JP" sz="900" dirty="0">
+                <a:solidFill>
+                  <a:schemeClr val="bg1"/>
+                </a:solidFill>
+              </a:rPr>
+              <a:t>BACK</a:t>
+            </a:r>
+            <a:endParaRPr kumimoji="1" lang="ja-JP" altLang="en-US" sz="900" dirty="0">
+              <a:solidFill>
+                <a:schemeClr val="bg1"/>
+              </a:solidFill>
+            </a:endParaRPr>
+          </a:p>
+        </p:txBody>
+      </p:sp>
+      <p:sp>
+        <p:nvSpPr>
+          <p:cNvPr id="37" name="テキスト ボックス 36">
+            <a:extLst>
+              <a:ext uri="{FF2B5EF4-FFF2-40B4-BE49-F238E27FC236}">
+                <a16:creationId xmlns:a16="http://schemas.microsoft.com/office/drawing/2014/main" id="{CDC4C5B2-8990-9CE4-C958-4EF876CEB682}"/>
+              </a:ext>
+            </a:extLst>
+          </p:cNvPr>
+          <p:cNvSpPr txBox="1"/>
+          <p:nvPr/>
+        </p:nvSpPr>
+        <p:spPr>
+          <a:xfrm>
+            <a:off x="3366322" y="721287"/>
+            <a:ext cx="553357" cy="230832"/>
+          </a:xfrm>
+          <a:prstGeom prst="rect">
+            <a:avLst/>
+          </a:prstGeom>
+          <a:noFill/>
+        </p:spPr>
+        <p:txBody>
+          <a:bodyPr wrap="none" rtlCol="0">
+            <a:spAutoFit/>
+          </a:bodyPr>
+          <a:lstStyle/>
+          <a:p>
+            <a:r>
+              <a:rPr lang="en-US" altLang="ja-JP" sz="900" dirty="0">
+                <a:solidFill>
+                  <a:schemeClr val="bg1"/>
+                </a:solidFill>
+              </a:rPr>
+              <a:t>START</a:t>
+            </a:r>
+            <a:endParaRPr kumimoji="1" lang="ja-JP" altLang="en-US" sz="900" dirty="0">
+              <a:solidFill>
+                <a:schemeClr val="bg1"/>
+              </a:solidFill>
+            </a:endParaRPr>
+          </a:p>
+        </p:txBody>
+      </p:sp>
+      <p:sp>
+        <p:nvSpPr>
+          <p:cNvPr id="39" name="テキスト ボックス 38">
+            <a:extLst>
+              <a:ext uri="{FF2B5EF4-FFF2-40B4-BE49-F238E27FC236}">
+                <a16:creationId xmlns:a16="http://schemas.microsoft.com/office/drawing/2014/main" id="{BCDA0994-AEA9-08A9-D7D7-30627133A314}"/>
+              </a:ext>
+            </a:extLst>
+          </p:cNvPr>
+          <p:cNvSpPr txBox="1"/>
+          <p:nvPr/>
+        </p:nvSpPr>
+        <p:spPr>
+          <a:xfrm>
+            <a:off x="4934918" y="976797"/>
+            <a:ext cx="308098" cy="307777"/>
+          </a:xfrm>
+          <a:prstGeom prst="rect">
+            <a:avLst/>
+          </a:prstGeom>
+          <a:noFill/>
+        </p:spPr>
+        <p:txBody>
+          <a:bodyPr wrap="none" rtlCol="0">
+            <a:spAutoFit/>
+          </a:bodyPr>
+          <a:lstStyle/>
+          <a:p>
+            <a:r>
+              <a:rPr lang="en-US" altLang="ja-JP" sz="1400" b="1" dirty="0"/>
+              <a:t>Y</a:t>
+            </a:r>
+            <a:endParaRPr kumimoji="1" lang="ja-JP" altLang="en-US" sz="1400" b="1" dirty="0"/>
+          </a:p>
+        </p:txBody>
+      </p:sp>
+      <p:sp>
+        <p:nvSpPr>
+          <p:cNvPr id="41" name="テキスト ボックス 40">
+            <a:extLst>
+              <a:ext uri="{FF2B5EF4-FFF2-40B4-BE49-F238E27FC236}">
+                <a16:creationId xmlns:a16="http://schemas.microsoft.com/office/drawing/2014/main" id="{F5180506-D163-2DBF-36E0-8C5BBCE16873}"/>
+              </a:ext>
+            </a:extLst>
+          </p:cNvPr>
+          <p:cNvSpPr txBox="1"/>
+          <p:nvPr/>
+        </p:nvSpPr>
+        <p:spPr>
+          <a:xfrm>
+            <a:off x="4052811" y="1141490"/>
+            <a:ext cx="308098" cy="307777"/>
+          </a:xfrm>
+          <a:prstGeom prst="rect">
+            <a:avLst/>
+          </a:prstGeom>
+          <a:noFill/>
+        </p:spPr>
+        <p:txBody>
+          <a:bodyPr wrap="none" rtlCol="0">
+            <a:spAutoFit/>
+          </a:bodyPr>
+          <a:lstStyle/>
+          <a:p>
+            <a:r>
+              <a:rPr kumimoji="1" lang="en-US" altLang="ja-JP" sz="1400" b="1" dirty="0"/>
+              <a:t>X</a:t>
+            </a:r>
+            <a:endParaRPr kumimoji="1" lang="ja-JP" altLang="en-US" sz="1400" b="1" dirty="0"/>
+          </a:p>
+        </p:txBody>
+      </p:sp>
+      <p:sp>
+        <p:nvSpPr>
+          <p:cNvPr id="43" name="テキスト ボックス 42">
+            <a:extLst>
+              <a:ext uri="{FF2B5EF4-FFF2-40B4-BE49-F238E27FC236}">
+                <a16:creationId xmlns:a16="http://schemas.microsoft.com/office/drawing/2014/main" id="{E37D2F43-999B-BA1D-66CF-92FD8DD1EDE9}"/>
+              </a:ext>
+            </a:extLst>
+          </p:cNvPr>
+          <p:cNvSpPr txBox="1"/>
+          <p:nvPr/>
+        </p:nvSpPr>
+        <p:spPr>
+          <a:xfrm>
+            <a:off x="5043668" y="2214683"/>
+            <a:ext cx="308098" cy="307777"/>
+          </a:xfrm>
+          <a:prstGeom prst="rect">
+            <a:avLst/>
+          </a:prstGeom>
+          <a:noFill/>
+        </p:spPr>
+        <p:txBody>
+          <a:bodyPr wrap="none" rtlCol="0">
+            <a:spAutoFit/>
+          </a:bodyPr>
+          <a:lstStyle/>
+          <a:p>
+            <a:r>
+              <a:rPr lang="en-US" altLang="ja-JP" sz="1400" b="1" dirty="0"/>
+              <a:t>A</a:t>
+            </a:r>
+            <a:endParaRPr kumimoji="1" lang="ja-JP" altLang="en-US" sz="1400" b="1" dirty="0"/>
+          </a:p>
+        </p:txBody>
+      </p:sp>
+      <p:sp>
+        <p:nvSpPr>
+          <p:cNvPr id="45" name="テキスト ボックス 44">
+            <a:extLst>
+              <a:ext uri="{FF2B5EF4-FFF2-40B4-BE49-F238E27FC236}">
+                <a16:creationId xmlns:a16="http://schemas.microsoft.com/office/drawing/2014/main" id="{C8FB1EF4-4693-6C75-FDBF-9A63D10AA5F6}"/>
+              </a:ext>
+            </a:extLst>
+          </p:cNvPr>
+          <p:cNvSpPr txBox="1"/>
+          <p:nvPr/>
+        </p:nvSpPr>
+        <p:spPr>
+          <a:xfrm>
+            <a:off x="5251419" y="1204986"/>
+            <a:ext cx="311304" cy="307777"/>
+          </a:xfrm>
+          <a:prstGeom prst="rect">
+            <a:avLst/>
+          </a:prstGeom>
+          <a:noFill/>
+        </p:spPr>
+        <p:txBody>
+          <a:bodyPr wrap="none" rtlCol="0">
+            <a:spAutoFit/>
+          </a:bodyPr>
+          <a:lstStyle/>
+          <a:p>
+            <a:r>
+              <a:rPr kumimoji="1" lang="en-US" altLang="ja-JP" sz="1400" b="1" dirty="0"/>
+              <a:t>B</a:t>
+            </a:r>
+            <a:endParaRPr kumimoji="1" lang="ja-JP" altLang="en-US" sz="1400" b="1" dirty="0"/>
+          </a:p>
+        </p:txBody>
+      </p:sp>
+      <p:sp>
+        <p:nvSpPr>
+          <p:cNvPr id="47" name="フローチャート: 結合子 46">
+            <a:extLst>
+              <a:ext uri="{FF2B5EF4-FFF2-40B4-BE49-F238E27FC236}">
+                <a16:creationId xmlns:a16="http://schemas.microsoft.com/office/drawing/2014/main" id="{11137AC0-39C3-E106-43CB-FECD1CFDC678}"/>
+              </a:ext>
+            </a:extLst>
+          </p:cNvPr>
+          <p:cNvSpPr/>
+          <p:nvPr/>
+        </p:nvSpPr>
+        <p:spPr>
+          <a:xfrm>
+            <a:off x="969818" y="1318987"/>
+            <a:ext cx="786830" cy="642388"/>
+          </a:xfrm>
+          <a:prstGeom prst="flowChartConnector">
+            <a:avLst/>
+          </a:prstGeom>
+          <a:solidFill>
+            <a:schemeClr val="dk1">
+              <a:alpha val="50000"/>
+            </a:schemeClr>
+          </a:solidFill>
+          <a:ln>
+            <a:noFill/>
+          </a:ln>
+        </p:spPr>
+        <p:style>
+          <a:lnRef idx="0">
+            <a:scrgbClr r="0" g="0" b="0"/>
+          </a:lnRef>
+          <a:fillRef idx="0">
+            <a:scrgbClr r="0" g="0" b="0"/>
+          </a:fillRef>
+          <a:effectRef idx="0">
+            <a:scrgbClr r="0" g="0" b="0"/>
+          </a:effectRef>
+          <a:fontRef idx="minor">
+            <a:schemeClr val="lt1"/>
+          </a:fontRef>
+        </p:style>
+        <p:txBody>
+          <a:bodyPr rtlCol="0" anchor="ctr"/>
+          <a:lstStyle/>
+          <a:p>
+            <a:pPr algn="ctr"/>
+            <a:r>
+              <a:rPr lang="ja-JP" altLang="en-US" sz="1200" dirty="0"/>
+              <a:t>使用</a:t>
+            </a:r>
+            <a:endParaRPr lang="en-US" altLang="ja-JP" sz="1200" dirty="0"/>
+          </a:p>
+          <a:p>
+            <a:pPr algn="ctr"/>
+            <a:r>
+              <a:rPr lang="ja-JP" altLang="en-US" sz="1200" dirty="0"/>
+              <a:t>不可</a:t>
+            </a:r>
+            <a:endParaRPr kumimoji="1" lang="ja-JP" altLang="en-US" sz="1200" dirty="0"/>
+          </a:p>
+        </p:txBody>
+      </p:sp>
+      <p:sp>
+        <p:nvSpPr>
+          <p:cNvPr id="48" name="正方形/長方形 47">
+            <a:extLst>
+              <a:ext uri="{FF2B5EF4-FFF2-40B4-BE49-F238E27FC236}">
+                <a16:creationId xmlns:a16="http://schemas.microsoft.com/office/drawing/2014/main" id="{87B61D0B-91DF-6F58-4F31-407F6E993740}"/>
+              </a:ext>
+            </a:extLst>
+          </p:cNvPr>
+          <p:cNvSpPr/>
+          <p:nvPr/>
+        </p:nvSpPr>
+        <p:spPr>
+          <a:xfrm>
+            <a:off x="1026021" y="3410802"/>
+            <a:ext cx="914400" cy="343041"/>
+          </a:xfrm>
+          <a:prstGeom prst="rect">
+            <a:avLst/>
+          </a:prstGeom>
+        </p:spPr>
+        <p:style>
+          <a:lnRef idx="2">
+            <a:schemeClr val="dk1"/>
+          </a:lnRef>
+          <a:fillRef idx="1">
+            <a:schemeClr val="lt1"/>
+          </a:fillRef>
+          <a:effectRef idx="0">
+            <a:schemeClr val="dk1"/>
+          </a:effectRef>
+          <a:fontRef idx="minor">
+            <a:schemeClr val="dk1"/>
+          </a:fontRef>
+        </p:style>
+        <p:txBody>
+          <a:bodyPr rtlCol="0" anchor="ctr"/>
+          <a:lstStyle/>
+          <a:p>
+            <a:pPr algn="ctr"/>
+            <a:r>
+              <a:rPr kumimoji="1" lang="en-US" altLang="ja-JP" sz="1100" dirty="0" err="1"/>
+              <a:t>bt_A_Up</a:t>
+            </a:r>
+            <a:endParaRPr kumimoji="1" lang="ja-JP" altLang="en-US" sz="1100" dirty="0"/>
+          </a:p>
+        </p:txBody>
+      </p:sp>
+      <p:sp>
+        <p:nvSpPr>
+          <p:cNvPr id="50" name="正方形/長方形 49">
+            <a:extLst>
+              <a:ext uri="{FF2B5EF4-FFF2-40B4-BE49-F238E27FC236}">
+                <a16:creationId xmlns:a16="http://schemas.microsoft.com/office/drawing/2014/main" id="{D279B649-4AC6-B568-14B4-79E9F2997626}"/>
+              </a:ext>
+            </a:extLst>
+          </p:cNvPr>
+          <p:cNvSpPr/>
+          <p:nvPr/>
+        </p:nvSpPr>
+        <p:spPr>
+          <a:xfrm>
+            <a:off x="1048221" y="4134639"/>
+            <a:ext cx="914400" cy="343041"/>
+          </a:xfrm>
+          <a:prstGeom prst="rect">
+            <a:avLst/>
+          </a:prstGeom>
+        </p:spPr>
+        <p:style>
+          <a:lnRef idx="2">
+            <a:schemeClr val="dk1"/>
+          </a:lnRef>
+          <a:fillRef idx="1">
+            <a:schemeClr val="lt1"/>
+          </a:fillRef>
+          <a:effectRef idx="0">
+            <a:schemeClr val="dk1"/>
+          </a:effectRef>
+          <a:fontRef idx="minor">
+            <a:schemeClr val="dk1"/>
+          </a:fontRef>
+        </p:style>
+        <p:txBody>
+          <a:bodyPr rtlCol="0" anchor="ctr"/>
+          <a:lstStyle/>
+          <a:p>
+            <a:pPr algn="ctr"/>
+            <a:r>
+              <a:rPr kumimoji="1" lang="en-US" altLang="ja-JP" sz="1050" dirty="0" err="1"/>
+              <a:t>bt_A_</a:t>
+            </a:r>
+            <a:r>
+              <a:rPr lang="en-US" altLang="ja-JP" sz="1050" dirty="0" err="1"/>
+              <a:t>Down</a:t>
+            </a:r>
+            <a:endParaRPr kumimoji="1" lang="ja-JP" altLang="en-US" sz="1050" dirty="0"/>
+          </a:p>
+        </p:txBody>
+      </p:sp>
+      <p:sp>
+        <p:nvSpPr>
+          <p:cNvPr id="52" name="正方形/長方形 51">
+            <a:extLst>
+              <a:ext uri="{FF2B5EF4-FFF2-40B4-BE49-F238E27FC236}">
+                <a16:creationId xmlns:a16="http://schemas.microsoft.com/office/drawing/2014/main" id="{C1F49BA4-E3F5-9689-C4A6-4A353FB78593}"/>
+              </a:ext>
+            </a:extLst>
+          </p:cNvPr>
+          <p:cNvSpPr/>
+          <p:nvPr/>
+        </p:nvSpPr>
+        <p:spPr>
+          <a:xfrm>
+            <a:off x="1254621" y="1947544"/>
+            <a:ext cx="914400" cy="343041"/>
+          </a:xfrm>
+          <a:prstGeom prst="rect">
+            <a:avLst/>
+          </a:prstGeom>
+        </p:spPr>
+        <p:style>
+          <a:lnRef idx="2">
+            <a:schemeClr val="dk1"/>
+          </a:lnRef>
+          <a:fillRef idx="1">
+            <a:schemeClr val="lt1"/>
+          </a:fillRef>
+          <a:effectRef idx="0">
+            <a:schemeClr val="dk1"/>
+          </a:effectRef>
+          <a:fontRef idx="minor">
+            <a:schemeClr val="dk1"/>
+          </a:fontRef>
+        </p:style>
+        <p:txBody>
+          <a:bodyPr rtlCol="0" anchor="ctr"/>
+          <a:lstStyle/>
+          <a:p>
+            <a:pPr algn="ctr"/>
+            <a:r>
+              <a:rPr kumimoji="1" lang="en-US" altLang="ja-JP" sz="1100" dirty="0" err="1"/>
+              <a:t>bt_D_St</a:t>
+            </a:r>
+            <a:endParaRPr kumimoji="1" lang="ja-JP" altLang="en-US" sz="1100" dirty="0"/>
+          </a:p>
+        </p:txBody>
+      </p:sp>
+      <p:sp>
+        <p:nvSpPr>
+          <p:cNvPr id="54" name="正方形/長方形 53">
+            <a:extLst>
+              <a:ext uri="{FF2B5EF4-FFF2-40B4-BE49-F238E27FC236}">
+                <a16:creationId xmlns:a16="http://schemas.microsoft.com/office/drawing/2014/main" id="{AB4B83B8-66BA-AC00-0801-4F7363328700}"/>
+              </a:ext>
+            </a:extLst>
+          </p:cNvPr>
+          <p:cNvSpPr/>
+          <p:nvPr/>
+        </p:nvSpPr>
+        <p:spPr>
+          <a:xfrm>
+            <a:off x="3163832" y="1358874"/>
+            <a:ext cx="705642" cy="343041"/>
+          </a:xfrm>
+          <a:prstGeom prst="rect">
+            <a:avLst/>
+          </a:prstGeom>
+        </p:spPr>
+        <p:style>
+          <a:lnRef idx="1">
+            <a:schemeClr val="dk1"/>
+          </a:lnRef>
+          <a:fillRef idx="2">
+            <a:schemeClr val="dk1"/>
+          </a:fillRef>
+          <a:effectRef idx="1">
+            <a:schemeClr val="dk1"/>
+          </a:effectRef>
+          <a:fontRef idx="minor">
+            <a:schemeClr val="dk1"/>
+          </a:fontRef>
+        </p:style>
+        <p:txBody>
+          <a:bodyPr rtlCol="0" anchor="ctr"/>
+          <a:lstStyle/>
+          <a:p>
+            <a:pPr algn="ctr"/>
+            <a:r>
+              <a:rPr lang="en-US" altLang="ja-JP" sz="1100" dirty="0"/>
+              <a:t>Pub</a:t>
+            </a:r>
+            <a:r>
+              <a:rPr kumimoji="1" lang="en-US" altLang="ja-JP" sz="1100" dirty="0"/>
+              <a:t> Start</a:t>
+            </a:r>
+            <a:endParaRPr kumimoji="1" lang="ja-JP" altLang="en-US" sz="1100" dirty="0"/>
+          </a:p>
+        </p:txBody>
+      </p:sp>
+      <p:sp>
+        <p:nvSpPr>
+          <p:cNvPr id="60" name="正方形/長方形 59">
+            <a:extLst>
+              <a:ext uri="{FF2B5EF4-FFF2-40B4-BE49-F238E27FC236}">
+                <a16:creationId xmlns:a16="http://schemas.microsoft.com/office/drawing/2014/main" id="{1C2511EC-9F95-060B-CB92-CF4B155D959C}"/>
+              </a:ext>
+            </a:extLst>
+          </p:cNvPr>
+          <p:cNvSpPr/>
+          <p:nvPr/>
+        </p:nvSpPr>
+        <p:spPr>
+          <a:xfrm>
+            <a:off x="577596" y="2930975"/>
+            <a:ext cx="1076498" cy="343041"/>
+          </a:xfrm>
+          <a:prstGeom prst="rect">
+            <a:avLst/>
+          </a:prstGeom>
+        </p:spPr>
+        <p:style>
+          <a:lnRef idx="2">
+            <a:schemeClr val="dk1"/>
+          </a:lnRef>
+          <a:fillRef idx="1">
+            <a:schemeClr val="lt1"/>
+          </a:fillRef>
+          <a:effectRef idx="0">
+            <a:schemeClr val="dk1"/>
+          </a:effectRef>
+          <a:fontRef idx="minor">
+            <a:schemeClr val="dk1"/>
+          </a:fontRef>
+        </p:style>
+        <p:txBody>
+          <a:bodyPr rtlCol="0" anchor="ctr"/>
+          <a:lstStyle/>
+          <a:p>
+            <a:pPr algn="ctr"/>
+            <a:r>
+              <a:rPr kumimoji="1" lang="en-US" altLang="ja-JP" sz="1100" dirty="0" err="1"/>
+              <a:t>bt_Str_S</a:t>
+            </a:r>
+            <a:endParaRPr kumimoji="1" lang="en-US" altLang="ja-JP" sz="1100" dirty="0"/>
+          </a:p>
+          <a:p>
+            <a:pPr algn="ctr"/>
+            <a:r>
+              <a:rPr lang="en-US" altLang="ja-JP" sz="1100" dirty="0"/>
+              <a:t>Value(-100)</a:t>
+            </a:r>
+            <a:endParaRPr kumimoji="1" lang="ja-JP" altLang="en-US" sz="1100" dirty="0"/>
+          </a:p>
+        </p:txBody>
+      </p:sp>
+      <p:sp>
+        <p:nvSpPr>
+          <p:cNvPr id="62" name="正方形/長方形 61">
+            <a:extLst>
+              <a:ext uri="{FF2B5EF4-FFF2-40B4-BE49-F238E27FC236}">
+                <a16:creationId xmlns:a16="http://schemas.microsoft.com/office/drawing/2014/main" id="{64935E09-F81E-0154-F940-1567085A22AE}"/>
+              </a:ext>
+            </a:extLst>
+          </p:cNvPr>
+          <p:cNvSpPr/>
+          <p:nvPr/>
+        </p:nvSpPr>
+        <p:spPr>
+          <a:xfrm>
+            <a:off x="2506630" y="3183944"/>
+            <a:ext cx="1014457" cy="343041"/>
+          </a:xfrm>
+          <a:prstGeom prst="rect">
+            <a:avLst/>
+          </a:prstGeom>
+        </p:spPr>
+        <p:style>
+          <a:lnRef idx="2">
+            <a:schemeClr val="dk1"/>
+          </a:lnRef>
+          <a:fillRef idx="1">
+            <a:schemeClr val="lt1"/>
+          </a:fillRef>
+          <a:effectRef idx="0">
+            <a:schemeClr val="dk1"/>
+          </a:effectRef>
+          <a:fontRef idx="minor">
+            <a:schemeClr val="dk1"/>
+          </a:fontRef>
+        </p:style>
+        <p:txBody>
+          <a:bodyPr rtlCol="0" anchor="ctr"/>
+          <a:lstStyle/>
+          <a:p>
+            <a:pPr algn="ctr"/>
+            <a:r>
+              <a:rPr kumimoji="1" lang="en-US" altLang="ja-JP" sz="1100" dirty="0" err="1"/>
+              <a:t>bt_Str_S</a:t>
+            </a:r>
+            <a:endParaRPr kumimoji="1" lang="en-US" altLang="ja-JP" sz="1100" dirty="0"/>
+          </a:p>
+          <a:p>
+            <a:pPr algn="ctr"/>
+            <a:r>
+              <a:rPr lang="en-US" altLang="ja-JP" sz="1100" dirty="0"/>
+              <a:t>Value(+100)</a:t>
+            </a:r>
+            <a:endParaRPr kumimoji="1" lang="ja-JP" altLang="en-US" sz="1100" dirty="0"/>
+          </a:p>
+        </p:txBody>
+      </p:sp>
+      <p:sp>
+        <p:nvSpPr>
+          <p:cNvPr id="64" name="正方形/長方形 63">
+            <a:extLst>
+              <a:ext uri="{FF2B5EF4-FFF2-40B4-BE49-F238E27FC236}">
+                <a16:creationId xmlns:a16="http://schemas.microsoft.com/office/drawing/2014/main" id="{0BC34861-834A-196E-6B93-FA00E3E4797E}"/>
+              </a:ext>
+            </a:extLst>
+          </p:cNvPr>
+          <p:cNvSpPr/>
+          <p:nvPr/>
+        </p:nvSpPr>
+        <p:spPr>
+          <a:xfrm>
+            <a:off x="2827909" y="2795702"/>
+            <a:ext cx="705642" cy="217064"/>
+          </a:xfrm>
+          <a:prstGeom prst="rect">
+            <a:avLst/>
+          </a:prstGeom>
+        </p:spPr>
+        <p:style>
+          <a:lnRef idx="2">
+            <a:schemeClr val="dk1"/>
+          </a:lnRef>
+          <a:fillRef idx="1">
+            <a:schemeClr val="lt1"/>
+          </a:fillRef>
+          <a:effectRef idx="0">
+            <a:schemeClr val="dk1"/>
+          </a:effectRef>
+          <a:fontRef idx="minor">
+            <a:schemeClr val="dk1"/>
+          </a:fontRef>
+        </p:style>
+        <p:txBody>
+          <a:bodyPr rtlCol="0" anchor="ctr"/>
+          <a:lstStyle/>
+          <a:p>
+            <a:pPr algn="ctr"/>
+            <a:r>
+              <a:rPr kumimoji="1" lang="en-US" altLang="ja-JP" sz="1100" dirty="0" err="1"/>
+              <a:t>stp_all</a:t>
+            </a:r>
+            <a:endParaRPr kumimoji="1" lang="ja-JP" altLang="en-US" sz="1100" dirty="0"/>
+          </a:p>
+        </p:txBody>
+      </p:sp>
+      <p:sp>
+        <p:nvSpPr>
+          <p:cNvPr id="66" name="正方形/長方形 65">
+            <a:extLst>
+              <a:ext uri="{FF2B5EF4-FFF2-40B4-BE49-F238E27FC236}">
+                <a16:creationId xmlns:a16="http://schemas.microsoft.com/office/drawing/2014/main" id="{D4C382C9-AED9-F42B-FF2F-BD73A364CD62}"/>
+              </a:ext>
+            </a:extLst>
+          </p:cNvPr>
+          <p:cNvSpPr/>
+          <p:nvPr/>
+        </p:nvSpPr>
+        <p:spPr>
+          <a:xfrm>
+            <a:off x="3248333" y="2006686"/>
+            <a:ext cx="914400" cy="343041"/>
+          </a:xfrm>
+          <a:prstGeom prst="rect">
+            <a:avLst/>
+          </a:prstGeom>
+        </p:spPr>
+        <p:style>
+          <a:lnRef idx="2">
+            <a:schemeClr val="dk1"/>
+          </a:lnRef>
+          <a:fillRef idx="1">
+            <a:schemeClr val="lt1"/>
+          </a:fillRef>
+          <a:effectRef idx="0">
+            <a:schemeClr val="dk1"/>
+          </a:effectRef>
+          <a:fontRef idx="minor">
+            <a:schemeClr val="dk1"/>
+          </a:fontRef>
+        </p:style>
+        <p:txBody>
+          <a:bodyPr rtlCol="0" anchor="ctr"/>
+          <a:lstStyle/>
+          <a:p>
+            <a:pPr algn="ctr"/>
+            <a:r>
+              <a:rPr kumimoji="1" lang="en-US" altLang="ja-JP" sz="1100" dirty="0" err="1"/>
+              <a:t>bt_D_St</a:t>
+            </a:r>
+            <a:endParaRPr kumimoji="1" lang="ja-JP" altLang="en-US" sz="1100" dirty="0"/>
+          </a:p>
+        </p:txBody>
+      </p:sp>
+      <p:sp>
+        <p:nvSpPr>
+          <p:cNvPr id="68" name="正方形/長方形 67">
+            <a:extLst>
+              <a:ext uri="{FF2B5EF4-FFF2-40B4-BE49-F238E27FC236}">
+                <a16:creationId xmlns:a16="http://schemas.microsoft.com/office/drawing/2014/main" id="{1821A271-BD4E-B8A8-9022-E7E963F210F9}"/>
+              </a:ext>
+            </a:extLst>
+          </p:cNvPr>
+          <p:cNvSpPr/>
+          <p:nvPr/>
+        </p:nvSpPr>
+        <p:spPr>
+          <a:xfrm>
+            <a:off x="4281949" y="1730733"/>
+            <a:ext cx="705642" cy="217064"/>
+          </a:xfrm>
+          <a:prstGeom prst="rect">
+            <a:avLst/>
+          </a:prstGeom>
+        </p:spPr>
+        <p:style>
+          <a:lnRef idx="2">
+            <a:schemeClr val="dk1"/>
+          </a:lnRef>
+          <a:fillRef idx="1">
+            <a:schemeClr val="lt1"/>
+          </a:fillRef>
+          <a:effectRef idx="0">
+            <a:schemeClr val="dk1"/>
+          </a:effectRef>
+          <a:fontRef idx="minor">
+            <a:schemeClr val="dk1"/>
+          </a:fontRef>
+        </p:style>
+        <p:txBody>
+          <a:bodyPr rtlCol="0" anchor="ctr"/>
+          <a:lstStyle/>
+          <a:p>
+            <a:pPr algn="ctr"/>
+            <a:r>
+              <a:rPr lang="en-US" altLang="ja-JP" sz="1100" dirty="0" err="1"/>
+              <a:t>bt_F</a:t>
+            </a:r>
+            <a:endParaRPr kumimoji="1" lang="ja-JP" altLang="en-US" sz="1100" dirty="0"/>
+          </a:p>
+        </p:txBody>
+      </p:sp>
+      <p:sp>
+        <p:nvSpPr>
+          <p:cNvPr id="70" name="正方形/長方形 69">
+            <a:extLst>
+              <a:ext uri="{FF2B5EF4-FFF2-40B4-BE49-F238E27FC236}">
+                <a16:creationId xmlns:a16="http://schemas.microsoft.com/office/drawing/2014/main" id="{78A8A098-C53F-F3F5-3DD9-D345D1C9FE8E}"/>
+              </a:ext>
+            </a:extLst>
+          </p:cNvPr>
+          <p:cNvSpPr/>
+          <p:nvPr/>
+        </p:nvSpPr>
+        <p:spPr>
+          <a:xfrm>
+            <a:off x="4786474" y="2350036"/>
+            <a:ext cx="705642" cy="217064"/>
+          </a:xfrm>
+          <a:prstGeom prst="rect">
+            <a:avLst/>
+          </a:prstGeom>
+        </p:spPr>
+        <p:style>
+          <a:lnRef idx="2">
+            <a:schemeClr val="dk1"/>
+          </a:lnRef>
+          <a:fillRef idx="1">
+            <a:schemeClr val="lt1"/>
+          </a:fillRef>
+          <a:effectRef idx="0">
+            <a:schemeClr val="dk1"/>
+          </a:effectRef>
+          <a:fontRef idx="minor">
+            <a:schemeClr val="dk1"/>
+          </a:fontRef>
+        </p:style>
+        <p:txBody>
+          <a:bodyPr rtlCol="0" anchor="ctr"/>
+          <a:lstStyle/>
+          <a:p>
+            <a:pPr algn="ctr"/>
+            <a:r>
+              <a:rPr lang="en-US" altLang="ja-JP" sz="1100" dirty="0" err="1"/>
+              <a:t>bt_S</a:t>
+            </a:r>
+            <a:endParaRPr kumimoji="1" lang="ja-JP" altLang="en-US" sz="1100" dirty="0"/>
+          </a:p>
+        </p:txBody>
+      </p:sp>
+      <p:sp>
+        <p:nvSpPr>
+          <p:cNvPr id="72" name="正方形/長方形 71">
+            <a:extLst>
+              <a:ext uri="{FF2B5EF4-FFF2-40B4-BE49-F238E27FC236}">
+                <a16:creationId xmlns:a16="http://schemas.microsoft.com/office/drawing/2014/main" id="{0B086D17-DE9E-3496-BEDC-F66B22679CA8}"/>
+              </a:ext>
+            </a:extLst>
+          </p:cNvPr>
+          <p:cNvSpPr/>
+          <p:nvPr/>
+        </p:nvSpPr>
+        <p:spPr>
+          <a:xfrm>
+            <a:off x="5229552" y="1839265"/>
+            <a:ext cx="705642" cy="225655"/>
+          </a:xfrm>
+          <a:prstGeom prst="rect">
+            <a:avLst/>
+          </a:prstGeom>
+        </p:spPr>
+        <p:style>
+          <a:lnRef idx="2">
+            <a:schemeClr val="dk1"/>
+          </a:lnRef>
+          <a:fillRef idx="1">
+            <a:schemeClr val="lt1"/>
+          </a:fillRef>
+          <a:effectRef idx="0">
+            <a:schemeClr val="dk1"/>
+          </a:effectRef>
+          <a:fontRef idx="minor">
+            <a:schemeClr val="dk1"/>
+          </a:fontRef>
+        </p:style>
+        <p:txBody>
+          <a:bodyPr rtlCol="0" anchor="ctr"/>
+          <a:lstStyle/>
+          <a:p>
+            <a:pPr algn="ctr"/>
+            <a:r>
+              <a:rPr kumimoji="1" lang="en-US" altLang="ja-JP" sz="1100" dirty="0" err="1"/>
+              <a:t>stp_all</a:t>
+            </a:r>
+            <a:endParaRPr kumimoji="1" lang="ja-JP" altLang="en-US" sz="1100" dirty="0"/>
+          </a:p>
+        </p:txBody>
+      </p:sp>
+      <p:sp>
+        <p:nvSpPr>
+          <p:cNvPr id="74" name="正方形/長方形 73">
+            <a:extLst>
+              <a:ext uri="{FF2B5EF4-FFF2-40B4-BE49-F238E27FC236}">
+                <a16:creationId xmlns:a16="http://schemas.microsoft.com/office/drawing/2014/main" id="{75EA39BE-6002-F0C9-C8BB-23D27AE20935}"/>
+              </a:ext>
+            </a:extLst>
+          </p:cNvPr>
+          <p:cNvSpPr/>
+          <p:nvPr/>
+        </p:nvSpPr>
+        <p:spPr>
+          <a:xfrm>
+            <a:off x="1807322" y="1353269"/>
+            <a:ext cx="705642" cy="343041"/>
+          </a:xfrm>
+          <a:prstGeom prst="rect">
+            <a:avLst/>
+          </a:prstGeom>
+        </p:spPr>
+        <p:style>
+          <a:lnRef idx="1">
+            <a:schemeClr val="dk1"/>
+          </a:lnRef>
+          <a:fillRef idx="2">
+            <a:schemeClr val="dk1"/>
+          </a:fillRef>
+          <a:effectRef idx="1">
+            <a:schemeClr val="dk1"/>
+          </a:effectRef>
+          <a:fontRef idx="minor">
+            <a:schemeClr val="dk1"/>
+          </a:fontRef>
+        </p:style>
+        <p:txBody>
+          <a:bodyPr rtlCol="0" anchor="ctr"/>
+          <a:lstStyle/>
+          <a:p>
+            <a:pPr algn="ctr"/>
+            <a:r>
+              <a:rPr lang="en-US" altLang="ja-JP" sz="1100" dirty="0"/>
+              <a:t>Pub</a:t>
+            </a:r>
+            <a:r>
+              <a:rPr kumimoji="1" lang="en-US" altLang="ja-JP" sz="1100" dirty="0"/>
+              <a:t> Stop</a:t>
+            </a:r>
+            <a:endParaRPr kumimoji="1" lang="ja-JP" altLang="en-US" sz="1100" dirty="0"/>
+          </a:p>
+        </p:txBody>
+      </p:sp>
+      <p:pic>
+        <p:nvPicPr>
+          <p:cNvPr id="76" name="図 75">
+            <a:extLst>
+              <a:ext uri="{FF2B5EF4-FFF2-40B4-BE49-F238E27FC236}">
+                <a16:creationId xmlns:a16="http://schemas.microsoft.com/office/drawing/2014/main" id="{5AEF3EE0-3954-68E0-17FB-165ABCFEBDDA}"/>
+              </a:ext>
+            </a:extLst>
+          </p:cNvPr>
+          <p:cNvPicPr>
+            <a:picLocks noChangeAspect="1"/>
+          </p:cNvPicPr>
+          <p:nvPr/>
+        </p:nvPicPr>
+        <p:blipFill>
+          <a:blip r:embed="rId3"/>
+          <a:stretch>
+            <a:fillRect/>
+          </a:stretch>
+        </p:blipFill>
+        <p:spPr>
+          <a:xfrm>
+            <a:off x="6162594" y="999991"/>
+            <a:ext cx="5882311" cy="2794483"/>
+          </a:xfrm>
+          <a:prstGeom prst="rect">
+            <a:avLst/>
+          </a:prstGeom>
+        </p:spPr>
+      </p:pic>
+      <p:sp>
+        <p:nvSpPr>
+          <p:cNvPr id="78" name="矢印: 下 77">
+            <a:extLst>
+              <a:ext uri="{FF2B5EF4-FFF2-40B4-BE49-F238E27FC236}">
+                <a16:creationId xmlns:a16="http://schemas.microsoft.com/office/drawing/2014/main" id="{2E898CC0-167E-143A-9EC2-A5608E2ED60D}"/>
+              </a:ext>
+            </a:extLst>
+          </p:cNvPr>
+          <p:cNvSpPr/>
+          <p:nvPr/>
+        </p:nvSpPr>
+        <p:spPr>
+          <a:xfrm>
+            <a:off x="7216003" y="1042476"/>
+            <a:ext cx="757382" cy="914400"/>
+          </a:xfrm>
+          <a:prstGeom prst="downArrow">
+            <a:avLst/>
+          </a:prstGeom>
+        </p:spPr>
+        <p:style>
+          <a:lnRef idx="3">
+            <a:schemeClr val="lt1"/>
+          </a:lnRef>
+          <a:fillRef idx="1">
+            <a:schemeClr val="accent2"/>
+          </a:fillRef>
+          <a:effectRef idx="1">
+            <a:schemeClr val="accent2"/>
+          </a:effectRef>
+          <a:fontRef idx="minor">
+            <a:schemeClr val="lt1"/>
+          </a:fontRef>
+        </p:style>
+        <p:txBody>
+          <a:bodyPr rtlCol="0" anchor="ctr"/>
+          <a:lstStyle/>
+          <a:p>
+            <a:pPr algn="ctr"/>
+            <a:r>
+              <a:rPr lang="en-US" altLang="ja-JP" sz="800" dirty="0"/>
+              <a:t>-1</a:t>
+            </a:r>
+          </a:p>
+          <a:p>
+            <a:pPr algn="ctr"/>
+            <a:endParaRPr lang="en-US" altLang="ja-JP" sz="800" dirty="0"/>
+          </a:p>
+          <a:p>
+            <a:pPr algn="ctr"/>
+            <a:r>
+              <a:rPr lang="en-US" altLang="ja-JP" sz="800" dirty="0"/>
+              <a:t>[2]</a:t>
+            </a:r>
+          </a:p>
+          <a:p>
+            <a:pPr algn="ctr"/>
+            <a:endParaRPr kumimoji="1" lang="en-US" altLang="ja-JP" sz="800" dirty="0"/>
+          </a:p>
+          <a:p>
+            <a:pPr algn="ctr"/>
+            <a:r>
+              <a:rPr lang="en-US" altLang="ja-JP" sz="800" dirty="0"/>
+              <a:t>+1</a:t>
+            </a:r>
+            <a:endParaRPr kumimoji="1" lang="ja-JP" altLang="en-US" sz="800" dirty="0"/>
+          </a:p>
+        </p:txBody>
+      </p:sp>
+      <p:sp>
+        <p:nvSpPr>
+          <p:cNvPr id="80" name="矢印: 下 79">
+            <a:extLst>
+              <a:ext uri="{FF2B5EF4-FFF2-40B4-BE49-F238E27FC236}">
+                <a16:creationId xmlns:a16="http://schemas.microsoft.com/office/drawing/2014/main" id="{916FB754-609C-3475-1562-1CFBB7E1F3DF}"/>
+              </a:ext>
+            </a:extLst>
+          </p:cNvPr>
+          <p:cNvSpPr/>
+          <p:nvPr/>
+        </p:nvSpPr>
+        <p:spPr>
+          <a:xfrm>
+            <a:off x="10235229" y="1101465"/>
+            <a:ext cx="757382" cy="914400"/>
+          </a:xfrm>
+          <a:prstGeom prst="downArrow">
+            <a:avLst/>
+          </a:prstGeom>
+        </p:spPr>
+        <p:style>
+          <a:lnRef idx="3">
+            <a:schemeClr val="lt1"/>
+          </a:lnRef>
+          <a:fillRef idx="1">
+            <a:schemeClr val="accent2"/>
+          </a:fillRef>
+          <a:effectRef idx="1">
+            <a:schemeClr val="accent2"/>
+          </a:effectRef>
+          <a:fontRef idx="minor">
+            <a:schemeClr val="lt1"/>
+          </a:fontRef>
+        </p:style>
+        <p:txBody>
+          <a:bodyPr rtlCol="0" anchor="ctr"/>
+          <a:lstStyle/>
+          <a:p>
+            <a:pPr algn="ctr"/>
+            <a:r>
+              <a:rPr lang="en-US" altLang="ja-JP" sz="800" dirty="0"/>
+              <a:t>-1</a:t>
+            </a:r>
+          </a:p>
+          <a:p>
+            <a:pPr algn="ctr"/>
+            <a:endParaRPr lang="en-US" altLang="ja-JP" sz="800" dirty="0"/>
+          </a:p>
+          <a:p>
+            <a:pPr algn="ctr"/>
+            <a:r>
+              <a:rPr lang="en-US" altLang="ja-JP" sz="800" dirty="0"/>
+              <a:t>[5]</a:t>
+            </a:r>
+          </a:p>
+          <a:p>
+            <a:pPr algn="ctr"/>
+            <a:endParaRPr kumimoji="1" lang="en-US" altLang="ja-JP" sz="800" dirty="0"/>
+          </a:p>
+          <a:p>
+            <a:pPr algn="ctr"/>
+            <a:r>
+              <a:rPr lang="en-US" altLang="ja-JP" sz="800" dirty="0"/>
+              <a:t>+1</a:t>
+            </a:r>
+            <a:endParaRPr kumimoji="1" lang="ja-JP" altLang="en-US" sz="800" dirty="0"/>
+          </a:p>
+        </p:txBody>
+      </p:sp>
+      <p:sp>
+        <p:nvSpPr>
+          <p:cNvPr id="82" name="テキスト ボックス 81">
+            <a:extLst>
+              <a:ext uri="{FF2B5EF4-FFF2-40B4-BE49-F238E27FC236}">
+                <a16:creationId xmlns:a16="http://schemas.microsoft.com/office/drawing/2014/main" id="{87349293-F34F-20FC-0793-B4EFAE8972D4}"/>
+              </a:ext>
+            </a:extLst>
+          </p:cNvPr>
+          <p:cNvSpPr txBox="1"/>
+          <p:nvPr/>
+        </p:nvSpPr>
+        <p:spPr>
+          <a:xfrm>
+            <a:off x="6696276" y="1300514"/>
+            <a:ext cx="500458" cy="276999"/>
+          </a:xfrm>
+          <a:prstGeom prst="rect">
+            <a:avLst/>
+          </a:prstGeom>
+          <a:noFill/>
+        </p:spPr>
+        <p:txBody>
+          <a:bodyPr wrap="none" rtlCol="0">
+            <a:spAutoFit/>
+          </a:bodyPr>
+          <a:lstStyle/>
+          <a:p>
+            <a:r>
+              <a:rPr lang="en-US" altLang="ja-JP" sz="1200" dirty="0">
+                <a:solidFill>
+                  <a:schemeClr val="bg1"/>
+                </a:solidFill>
+              </a:rPr>
+              <a:t>7:LT</a:t>
+            </a:r>
+            <a:endParaRPr kumimoji="1" lang="ja-JP" altLang="en-US" sz="1200" dirty="0">
+              <a:solidFill>
+                <a:schemeClr val="bg1"/>
+              </a:solidFill>
+            </a:endParaRPr>
+          </a:p>
+        </p:txBody>
+      </p:sp>
+      <p:sp>
+        <p:nvSpPr>
+          <p:cNvPr id="84" name="テキスト ボックス 83">
+            <a:extLst>
+              <a:ext uri="{FF2B5EF4-FFF2-40B4-BE49-F238E27FC236}">
+                <a16:creationId xmlns:a16="http://schemas.microsoft.com/office/drawing/2014/main" id="{BBEE2CF4-BD92-2296-3DAA-02D6393F08A3}"/>
+              </a:ext>
+            </a:extLst>
+          </p:cNvPr>
+          <p:cNvSpPr txBox="1"/>
+          <p:nvPr/>
+        </p:nvSpPr>
+        <p:spPr>
+          <a:xfrm>
+            <a:off x="10943816" y="1358874"/>
+            <a:ext cx="511679" cy="276999"/>
+          </a:xfrm>
+          <a:prstGeom prst="rect">
+            <a:avLst/>
+          </a:prstGeom>
+          <a:noFill/>
+        </p:spPr>
+        <p:txBody>
+          <a:bodyPr wrap="none" rtlCol="0">
+            <a:spAutoFit/>
+          </a:bodyPr>
+          <a:lstStyle/>
+          <a:p>
+            <a:r>
+              <a:rPr lang="en-US" altLang="ja-JP" sz="1200" dirty="0">
+                <a:solidFill>
+                  <a:schemeClr val="bg1"/>
+                </a:solidFill>
+              </a:rPr>
+              <a:t>8:RT</a:t>
+            </a:r>
+            <a:endParaRPr kumimoji="1" lang="ja-JP" altLang="en-US" sz="1200" dirty="0">
+              <a:solidFill>
+                <a:schemeClr val="bg1"/>
+              </a:solidFill>
+            </a:endParaRPr>
+          </a:p>
+        </p:txBody>
+      </p:sp>
+      <p:sp>
+        <p:nvSpPr>
+          <p:cNvPr id="86" name="テキスト ボックス 85">
+            <a:extLst>
+              <a:ext uri="{FF2B5EF4-FFF2-40B4-BE49-F238E27FC236}">
+                <a16:creationId xmlns:a16="http://schemas.microsoft.com/office/drawing/2014/main" id="{EE079A94-91DC-CAC8-8B49-EDCED68CDE95}"/>
+              </a:ext>
+            </a:extLst>
+          </p:cNvPr>
+          <p:cNvSpPr txBox="1"/>
+          <p:nvPr/>
+        </p:nvSpPr>
+        <p:spPr>
+          <a:xfrm>
+            <a:off x="6287557" y="1937684"/>
+            <a:ext cx="508473" cy="276999"/>
+          </a:xfrm>
+          <a:prstGeom prst="rect">
+            <a:avLst/>
+          </a:prstGeom>
+          <a:noFill/>
+        </p:spPr>
+        <p:txBody>
+          <a:bodyPr wrap="none" rtlCol="0">
+            <a:spAutoFit/>
+          </a:bodyPr>
+          <a:lstStyle/>
+          <a:p>
+            <a:r>
+              <a:rPr lang="en-US" altLang="ja-JP" sz="1200" dirty="0">
+                <a:solidFill>
+                  <a:schemeClr val="bg1"/>
+                </a:solidFill>
+              </a:rPr>
+              <a:t>5:LB</a:t>
+            </a:r>
+            <a:endParaRPr kumimoji="1" lang="ja-JP" altLang="en-US" sz="1200" dirty="0">
+              <a:solidFill>
+                <a:schemeClr val="bg1"/>
+              </a:solidFill>
+            </a:endParaRPr>
+          </a:p>
+        </p:txBody>
+      </p:sp>
+      <p:sp>
+        <p:nvSpPr>
+          <p:cNvPr id="88" name="フローチャート: 結合子 87">
+            <a:extLst>
+              <a:ext uri="{FF2B5EF4-FFF2-40B4-BE49-F238E27FC236}">
+                <a16:creationId xmlns:a16="http://schemas.microsoft.com/office/drawing/2014/main" id="{76A87610-42C4-3DAC-3479-F1670D248DD9}"/>
+              </a:ext>
+            </a:extLst>
+          </p:cNvPr>
+          <p:cNvSpPr/>
+          <p:nvPr/>
+        </p:nvSpPr>
+        <p:spPr>
+          <a:xfrm>
+            <a:off x="6796030" y="1776449"/>
+            <a:ext cx="457200" cy="457200"/>
+          </a:xfrm>
+          <a:prstGeom prst="flowChartConnector">
+            <a:avLst/>
+          </a:prstGeom>
+        </p:spPr>
+        <p:style>
+          <a:lnRef idx="3">
+            <a:schemeClr val="lt1"/>
+          </a:lnRef>
+          <a:fillRef idx="1">
+            <a:schemeClr val="accent5"/>
+          </a:fillRef>
+          <a:effectRef idx="1">
+            <a:schemeClr val="accent5"/>
+          </a:effectRef>
+          <a:fontRef idx="minor">
+            <a:schemeClr val="lt1"/>
+          </a:fontRef>
+        </p:style>
+        <p:txBody>
+          <a:bodyPr rtlCol="0" anchor="ctr"/>
+          <a:lstStyle/>
+          <a:p>
+            <a:pPr algn="ctr"/>
+            <a:r>
+              <a:rPr kumimoji="1" lang="en-US" altLang="ja-JP" sz="1200" dirty="0"/>
+              <a:t>4</a:t>
+            </a:r>
+            <a:endParaRPr kumimoji="1" lang="ja-JP" altLang="en-US" sz="1200" dirty="0"/>
+          </a:p>
+        </p:txBody>
+      </p:sp>
+      <p:sp>
+        <p:nvSpPr>
+          <p:cNvPr id="90" name="フローチャート: 結合子 89">
+            <a:extLst>
+              <a:ext uri="{FF2B5EF4-FFF2-40B4-BE49-F238E27FC236}">
+                <a16:creationId xmlns:a16="http://schemas.microsoft.com/office/drawing/2014/main" id="{24D291E7-D4E8-028F-A061-BEC0A55D64C8}"/>
+              </a:ext>
+            </a:extLst>
+          </p:cNvPr>
+          <p:cNvSpPr/>
+          <p:nvPr/>
+        </p:nvSpPr>
+        <p:spPr>
+          <a:xfrm>
+            <a:off x="10856799" y="1940032"/>
+            <a:ext cx="457200" cy="457200"/>
+          </a:xfrm>
+          <a:prstGeom prst="flowChartConnector">
+            <a:avLst/>
+          </a:prstGeom>
+        </p:spPr>
+        <p:style>
+          <a:lnRef idx="3">
+            <a:schemeClr val="lt1"/>
+          </a:lnRef>
+          <a:fillRef idx="1">
+            <a:schemeClr val="accent5"/>
+          </a:fillRef>
+          <a:effectRef idx="1">
+            <a:schemeClr val="accent5"/>
+          </a:effectRef>
+          <a:fontRef idx="minor">
+            <a:schemeClr val="lt1"/>
+          </a:fontRef>
+        </p:style>
+        <p:txBody>
+          <a:bodyPr rtlCol="0" anchor="ctr"/>
+          <a:lstStyle/>
+          <a:p>
+            <a:pPr algn="ctr"/>
+            <a:r>
+              <a:rPr lang="en-US" altLang="ja-JP" sz="1200" dirty="0"/>
+              <a:t>5</a:t>
+            </a:r>
+            <a:endParaRPr kumimoji="1" lang="ja-JP" altLang="en-US" sz="1200" dirty="0"/>
+          </a:p>
+        </p:txBody>
+      </p:sp>
+      <p:sp>
+        <p:nvSpPr>
+          <p:cNvPr id="92" name="テキスト ボックス 91">
+            <a:extLst>
+              <a:ext uri="{FF2B5EF4-FFF2-40B4-BE49-F238E27FC236}">
+                <a16:creationId xmlns:a16="http://schemas.microsoft.com/office/drawing/2014/main" id="{E7743F6E-AA43-7304-7541-260D150810FF}"/>
+              </a:ext>
+            </a:extLst>
+          </p:cNvPr>
+          <p:cNvSpPr txBox="1"/>
+          <p:nvPr/>
+        </p:nvSpPr>
+        <p:spPr>
+          <a:xfrm>
+            <a:off x="11313999" y="1961375"/>
+            <a:ext cx="519694" cy="276999"/>
+          </a:xfrm>
+          <a:prstGeom prst="rect">
+            <a:avLst/>
+          </a:prstGeom>
+          <a:noFill/>
+        </p:spPr>
+        <p:txBody>
+          <a:bodyPr wrap="none" rtlCol="0">
+            <a:spAutoFit/>
+          </a:bodyPr>
+          <a:lstStyle/>
+          <a:p>
+            <a:r>
+              <a:rPr lang="en-US" altLang="ja-JP" sz="1200" dirty="0">
+                <a:solidFill>
+                  <a:schemeClr val="bg1"/>
+                </a:solidFill>
+              </a:rPr>
+              <a:t>8:RB</a:t>
+            </a:r>
+            <a:endParaRPr kumimoji="1" lang="ja-JP" altLang="en-US" sz="1200" dirty="0">
+              <a:solidFill>
+                <a:schemeClr val="bg1"/>
+              </a:solidFill>
+            </a:endParaRPr>
+          </a:p>
+        </p:txBody>
+      </p:sp>
+      <p:sp>
+        <p:nvSpPr>
+          <p:cNvPr id="94" name="テキスト ボックス 93">
+            <a:extLst>
+              <a:ext uri="{FF2B5EF4-FFF2-40B4-BE49-F238E27FC236}">
+                <a16:creationId xmlns:a16="http://schemas.microsoft.com/office/drawing/2014/main" id="{AC9B9CC3-DDC0-4CE7-2DB3-32DA17DA8AD5}"/>
+              </a:ext>
+            </a:extLst>
+          </p:cNvPr>
+          <p:cNvSpPr txBox="1"/>
+          <p:nvPr/>
+        </p:nvSpPr>
+        <p:spPr>
+          <a:xfrm>
+            <a:off x="8487694" y="977317"/>
+            <a:ext cx="966931" cy="646331"/>
+          </a:xfrm>
+          <a:prstGeom prst="rect">
+            <a:avLst/>
+          </a:prstGeom>
+          <a:noFill/>
+        </p:spPr>
+        <p:txBody>
+          <a:bodyPr wrap="none" rtlCol="0">
+            <a:spAutoFit/>
+          </a:bodyPr>
+          <a:lstStyle/>
+          <a:p>
+            <a:r>
+              <a:rPr kumimoji="1" lang="en-US" altLang="ja-JP" sz="1200" dirty="0">
+                <a:solidFill>
+                  <a:schemeClr val="bg1"/>
+                </a:solidFill>
+              </a:rPr>
+              <a:t>ELECOM</a:t>
+            </a:r>
+          </a:p>
+          <a:p>
+            <a:r>
+              <a:rPr lang="en-US" altLang="ja-JP" sz="1200" dirty="0">
+                <a:solidFill>
+                  <a:schemeClr val="bg1"/>
+                </a:solidFill>
+              </a:rPr>
+              <a:t>JC-U4113S</a:t>
+            </a:r>
+          </a:p>
+          <a:p>
+            <a:r>
+              <a:rPr kumimoji="1" lang="en-US" altLang="ja-JP" sz="1200" dirty="0">
+                <a:solidFill>
+                  <a:schemeClr val="bg1"/>
+                </a:solidFill>
+              </a:rPr>
+              <a:t>X-mode</a:t>
+            </a:r>
+            <a:endParaRPr kumimoji="1" lang="ja-JP" altLang="en-US" sz="1200" dirty="0">
+              <a:solidFill>
+                <a:schemeClr val="bg1"/>
+              </a:solidFill>
+            </a:endParaRPr>
+          </a:p>
+        </p:txBody>
+      </p:sp>
+      <p:sp>
+        <p:nvSpPr>
+          <p:cNvPr id="96" name="フローチャート: 結合子 95">
+            <a:extLst>
+              <a:ext uri="{FF2B5EF4-FFF2-40B4-BE49-F238E27FC236}">
+                <a16:creationId xmlns:a16="http://schemas.microsoft.com/office/drawing/2014/main" id="{F4143F2B-356C-BEA6-BB3A-90896B4CB735}"/>
+              </a:ext>
+            </a:extLst>
+          </p:cNvPr>
+          <p:cNvSpPr/>
+          <p:nvPr/>
+        </p:nvSpPr>
+        <p:spPr>
+          <a:xfrm>
+            <a:off x="8866909" y="2096654"/>
+            <a:ext cx="1044129" cy="304588"/>
+          </a:xfrm>
+          <a:prstGeom prst="flowChartConnector">
+            <a:avLst/>
+          </a:prstGeom>
+          <a:noFill/>
+          <a:ln>
+            <a:solidFill>
+              <a:srgbClr val="C00000"/>
+            </a:solidFill>
+          </a:ln>
+        </p:spPr>
+        <p:style>
+          <a:lnRef idx="2">
+            <a:schemeClr val="dk1"/>
+          </a:lnRef>
+          <a:fillRef idx="1">
+            <a:schemeClr val="lt1"/>
+          </a:fillRef>
+          <a:effectRef idx="0">
+            <a:schemeClr val="dk1"/>
+          </a:effectRef>
+          <a:fontRef idx="minor">
+            <a:schemeClr val="dk1"/>
+          </a:fontRef>
+        </p:style>
+        <p:txBody>
+          <a:bodyPr rtlCol="0" anchor="ctr"/>
+          <a:lstStyle/>
+          <a:p>
+            <a:pPr algn="ctr"/>
+            <a:r>
+              <a:rPr kumimoji="1" lang="en-US" altLang="ja-JP" sz="900" dirty="0">
+                <a:solidFill>
+                  <a:srgbClr val="FF0000"/>
+                </a:solidFill>
+              </a:rPr>
+              <a:t>X</a:t>
+            </a:r>
+            <a:r>
+              <a:rPr kumimoji="1" lang="ja-JP" altLang="en-US" sz="900" dirty="0">
+                <a:solidFill>
+                  <a:srgbClr val="FF0000"/>
+                </a:solidFill>
+              </a:rPr>
+              <a:t>固定</a:t>
+            </a:r>
+          </a:p>
+        </p:txBody>
+      </p:sp>
+      <p:sp>
+        <p:nvSpPr>
+          <p:cNvPr id="98" name="フローチャート: 結合子 97">
+            <a:extLst>
+              <a:ext uri="{FF2B5EF4-FFF2-40B4-BE49-F238E27FC236}">
+                <a16:creationId xmlns:a16="http://schemas.microsoft.com/office/drawing/2014/main" id="{60AD6CD7-EF5F-B0DF-E1BA-BDC107E4F788}"/>
+              </a:ext>
+            </a:extLst>
+          </p:cNvPr>
+          <p:cNvSpPr/>
+          <p:nvPr/>
+        </p:nvSpPr>
+        <p:spPr>
+          <a:xfrm>
+            <a:off x="6171874" y="2375078"/>
+            <a:ext cx="1044129" cy="488196"/>
+          </a:xfrm>
+          <a:prstGeom prst="flowChartConnector">
+            <a:avLst/>
+          </a:prstGeom>
+          <a:solidFill>
+            <a:schemeClr val="dk1">
+              <a:alpha val="50000"/>
+            </a:schemeClr>
+          </a:solidFill>
+          <a:ln>
+            <a:noFill/>
+          </a:ln>
+        </p:spPr>
+        <p:style>
+          <a:lnRef idx="0">
+            <a:scrgbClr r="0" g="0" b="0"/>
+          </a:lnRef>
+          <a:fillRef idx="0">
+            <a:scrgbClr r="0" g="0" b="0"/>
+          </a:fillRef>
+          <a:effectRef idx="0">
+            <a:scrgbClr r="0" g="0" b="0"/>
+          </a:effectRef>
+          <a:fontRef idx="minor">
+            <a:schemeClr val="lt1"/>
+          </a:fontRef>
+        </p:style>
+        <p:txBody>
+          <a:bodyPr rtlCol="0" anchor="ctr"/>
+          <a:lstStyle/>
+          <a:p>
+            <a:pPr algn="ctr"/>
+            <a:r>
+              <a:rPr lang="ja-JP" altLang="en-US" sz="1050" dirty="0"/>
+              <a:t>使用不可</a:t>
+            </a:r>
+            <a:endParaRPr kumimoji="1" lang="ja-JP" altLang="en-US" sz="1050" dirty="0"/>
+          </a:p>
+        </p:txBody>
+      </p:sp>
+      <p:sp>
+        <p:nvSpPr>
+          <p:cNvPr id="100" name="フローチャート: 結合子 99">
+            <a:extLst>
+              <a:ext uri="{FF2B5EF4-FFF2-40B4-BE49-F238E27FC236}">
+                <a16:creationId xmlns:a16="http://schemas.microsoft.com/office/drawing/2014/main" id="{66E0D435-9869-F034-F8D0-8657C05699A5}"/>
+              </a:ext>
+            </a:extLst>
+          </p:cNvPr>
+          <p:cNvSpPr/>
+          <p:nvPr/>
+        </p:nvSpPr>
+        <p:spPr>
+          <a:xfrm>
+            <a:off x="10822267" y="2454304"/>
+            <a:ext cx="1044129" cy="488196"/>
+          </a:xfrm>
+          <a:prstGeom prst="flowChartConnector">
+            <a:avLst/>
+          </a:prstGeom>
+          <a:solidFill>
+            <a:schemeClr val="dk1">
+              <a:alpha val="50000"/>
+            </a:schemeClr>
+          </a:solidFill>
+          <a:ln>
+            <a:noFill/>
+          </a:ln>
+        </p:spPr>
+        <p:style>
+          <a:lnRef idx="0">
+            <a:scrgbClr r="0" g="0" b="0"/>
+          </a:lnRef>
+          <a:fillRef idx="0">
+            <a:scrgbClr r="0" g="0" b="0"/>
+          </a:fillRef>
+          <a:effectRef idx="0">
+            <a:scrgbClr r="0" g="0" b="0"/>
+          </a:effectRef>
+          <a:fontRef idx="minor">
+            <a:schemeClr val="lt1"/>
+          </a:fontRef>
+        </p:style>
+        <p:txBody>
+          <a:bodyPr rtlCol="0" anchor="ctr"/>
+          <a:lstStyle/>
+          <a:p>
+            <a:pPr algn="ctr"/>
+            <a:r>
+              <a:rPr lang="ja-JP" altLang="en-US" sz="1050" dirty="0"/>
+              <a:t>使用不可</a:t>
+            </a:r>
+            <a:endParaRPr kumimoji="1" lang="ja-JP" altLang="en-US" sz="1050" dirty="0"/>
+          </a:p>
+        </p:txBody>
+      </p:sp>
+      <p:sp>
+        <p:nvSpPr>
+          <p:cNvPr id="102" name="正方形/長方形 101">
+            <a:extLst>
+              <a:ext uri="{FF2B5EF4-FFF2-40B4-BE49-F238E27FC236}">
+                <a16:creationId xmlns:a16="http://schemas.microsoft.com/office/drawing/2014/main" id="{8997F6E8-FBA0-FFC0-23E0-73AAA8268412}"/>
+              </a:ext>
+            </a:extLst>
+          </p:cNvPr>
+          <p:cNvSpPr/>
+          <p:nvPr/>
+        </p:nvSpPr>
+        <p:spPr>
+          <a:xfrm>
+            <a:off x="7143022" y="2089544"/>
+            <a:ext cx="705642" cy="343041"/>
+          </a:xfrm>
+          <a:prstGeom prst="rect">
+            <a:avLst/>
+          </a:prstGeom>
+        </p:spPr>
+        <p:style>
+          <a:lnRef idx="1">
+            <a:schemeClr val="dk1"/>
+          </a:lnRef>
+          <a:fillRef idx="2">
+            <a:schemeClr val="dk1"/>
+          </a:fillRef>
+          <a:effectRef idx="1">
+            <a:schemeClr val="dk1"/>
+          </a:effectRef>
+          <a:fontRef idx="minor">
+            <a:schemeClr val="dk1"/>
+          </a:fontRef>
+        </p:style>
+        <p:txBody>
+          <a:bodyPr rtlCol="0" anchor="ctr"/>
+          <a:lstStyle/>
+          <a:p>
+            <a:pPr algn="ctr"/>
+            <a:r>
+              <a:rPr lang="en-US" altLang="ja-JP" sz="1100" dirty="0"/>
+              <a:t>Pub</a:t>
+            </a:r>
+            <a:r>
+              <a:rPr kumimoji="1" lang="en-US" altLang="ja-JP" sz="1100" dirty="0"/>
+              <a:t> Stop</a:t>
+            </a:r>
+            <a:endParaRPr kumimoji="1" lang="ja-JP" altLang="en-US" sz="1100" dirty="0"/>
+          </a:p>
+        </p:txBody>
+      </p:sp>
+      <p:sp>
+        <p:nvSpPr>
+          <p:cNvPr id="104" name="正方形/長方形 103">
+            <a:extLst>
+              <a:ext uri="{FF2B5EF4-FFF2-40B4-BE49-F238E27FC236}">
+                <a16:creationId xmlns:a16="http://schemas.microsoft.com/office/drawing/2014/main" id="{EE64AD3C-AA4B-1507-F8F7-542521D362CB}"/>
+              </a:ext>
+            </a:extLst>
+          </p:cNvPr>
+          <p:cNvSpPr/>
+          <p:nvPr/>
+        </p:nvSpPr>
+        <p:spPr>
+          <a:xfrm>
+            <a:off x="10272125" y="2063564"/>
+            <a:ext cx="705642" cy="343041"/>
+          </a:xfrm>
+          <a:prstGeom prst="rect">
+            <a:avLst/>
+          </a:prstGeom>
+        </p:spPr>
+        <p:style>
+          <a:lnRef idx="1">
+            <a:schemeClr val="dk1"/>
+          </a:lnRef>
+          <a:fillRef idx="2">
+            <a:schemeClr val="dk1"/>
+          </a:fillRef>
+          <a:effectRef idx="1">
+            <a:schemeClr val="dk1"/>
+          </a:effectRef>
+          <a:fontRef idx="minor">
+            <a:schemeClr val="dk1"/>
+          </a:fontRef>
+        </p:style>
+        <p:txBody>
+          <a:bodyPr rtlCol="0" anchor="ctr"/>
+          <a:lstStyle/>
+          <a:p>
+            <a:pPr algn="ctr"/>
+            <a:r>
+              <a:rPr lang="en-US" altLang="ja-JP" sz="1100" dirty="0"/>
+              <a:t>Pub</a:t>
+            </a:r>
+            <a:r>
+              <a:rPr kumimoji="1" lang="en-US" altLang="ja-JP" sz="1100" dirty="0"/>
+              <a:t> Start</a:t>
+            </a:r>
+            <a:endParaRPr kumimoji="1" lang="ja-JP" altLang="en-US" sz="1100" dirty="0"/>
+          </a:p>
+        </p:txBody>
+      </p:sp>
+      <p:sp>
+        <p:nvSpPr>
+          <p:cNvPr id="106" name="正方形/長方形 105">
+            <a:extLst>
+              <a:ext uri="{FF2B5EF4-FFF2-40B4-BE49-F238E27FC236}">
+                <a16:creationId xmlns:a16="http://schemas.microsoft.com/office/drawing/2014/main" id="{8D1B5BD7-DB0E-C2BB-DD96-8EBF1B3F7056}"/>
+              </a:ext>
+            </a:extLst>
+          </p:cNvPr>
+          <p:cNvSpPr/>
+          <p:nvPr/>
+        </p:nvSpPr>
+        <p:spPr>
+          <a:xfrm>
+            <a:off x="3691774" y="2717358"/>
+            <a:ext cx="1076498" cy="343041"/>
+          </a:xfrm>
+          <a:prstGeom prst="rect">
+            <a:avLst/>
+          </a:prstGeom>
+        </p:spPr>
+        <p:style>
+          <a:lnRef idx="2">
+            <a:schemeClr val="dk1"/>
+          </a:lnRef>
+          <a:fillRef idx="1">
+            <a:schemeClr val="lt1"/>
+          </a:fillRef>
+          <a:effectRef idx="0">
+            <a:schemeClr val="dk1"/>
+          </a:effectRef>
+          <a:fontRef idx="minor">
+            <a:schemeClr val="dk1"/>
+          </a:fontRef>
+        </p:style>
+        <p:txBody>
+          <a:bodyPr rtlCol="0" anchor="ctr"/>
+          <a:lstStyle/>
+          <a:p>
+            <a:pPr algn="ctr"/>
+            <a:r>
+              <a:rPr kumimoji="1" lang="en-US" altLang="ja-JP" sz="1100" dirty="0" err="1"/>
+              <a:t>bt_Str_S</a:t>
+            </a:r>
+            <a:endParaRPr kumimoji="1" lang="en-US" altLang="ja-JP" sz="1100" dirty="0"/>
+          </a:p>
+          <a:p>
+            <a:pPr algn="ctr"/>
+            <a:r>
+              <a:rPr lang="en-US" altLang="ja-JP" sz="1100" dirty="0"/>
+              <a:t>Value(-100)</a:t>
+            </a:r>
+            <a:endParaRPr kumimoji="1" lang="ja-JP" altLang="en-US" sz="1100" dirty="0"/>
+          </a:p>
+        </p:txBody>
+      </p:sp>
+      <p:sp>
+        <p:nvSpPr>
+          <p:cNvPr id="108" name="正方形/長方形 107">
+            <a:extLst>
+              <a:ext uri="{FF2B5EF4-FFF2-40B4-BE49-F238E27FC236}">
+                <a16:creationId xmlns:a16="http://schemas.microsoft.com/office/drawing/2014/main" id="{BCAAC4EB-8973-F026-4EA6-8403C2530FA1}"/>
+              </a:ext>
+            </a:extLst>
+          </p:cNvPr>
+          <p:cNvSpPr/>
+          <p:nvPr/>
+        </p:nvSpPr>
+        <p:spPr>
+          <a:xfrm>
+            <a:off x="4966562" y="2698402"/>
+            <a:ext cx="1014457" cy="343041"/>
+          </a:xfrm>
+          <a:prstGeom prst="rect">
+            <a:avLst/>
+          </a:prstGeom>
+        </p:spPr>
+        <p:style>
+          <a:lnRef idx="2">
+            <a:schemeClr val="dk1"/>
+          </a:lnRef>
+          <a:fillRef idx="1">
+            <a:schemeClr val="lt1"/>
+          </a:fillRef>
+          <a:effectRef idx="0">
+            <a:schemeClr val="dk1"/>
+          </a:effectRef>
+          <a:fontRef idx="minor">
+            <a:schemeClr val="dk1"/>
+          </a:fontRef>
+        </p:style>
+        <p:txBody>
+          <a:bodyPr rtlCol="0" anchor="ctr"/>
+          <a:lstStyle/>
+          <a:p>
+            <a:pPr algn="ctr"/>
+            <a:r>
+              <a:rPr kumimoji="1" lang="en-US" altLang="ja-JP" sz="1100" dirty="0" err="1"/>
+              <a:t>bt_Str_S</a:t>
+            </a:r>
+            <a:endParaRPr kumimoji="1" lang="en-US" altLang="ja-JP" sz="1100" dirty="0"/>
+          </a:p>
+          <a:p>
+            <a:pPr algn="ctr"/>
+            <a:r>
+              <a:rPr lang="en-US" altLang="ja-JP" sz="1100" dirty="0"/>
+              <a:t>Value(+100)</a:t>
+            </a:r>
+            <a:endParaRPr kumimoji="1" lang="ja-JP" altLang="en-US" sz="1100" dirty="0"/>
+          </a:p>
+        </p:txBody>
+      </p:sp>
+      <p:sp>
+        <p:nvSpPr>
+          <p:cNvPr id="110" name="正方形/長方形 109">
+            <a:extLst>
+              <a:ext uri="{FF2B5EF4-FFF2-40B4-BE49-F238E27FC236}">
+                <a16:creationId xmlns:a16="http://schemas.microsoft.com/office/drawing/2014/main" id="{04080688-1D66-6116-9790-CAFDBB0A35FB}"/>
+              </a:ext>
+            </a:extLst>
+          </p:cNvPr>
+          <p:cNvSpPr/>
+          <p:nvPr/>
+        </p:nvSpPr>
+        <p:spPr>
+          <a:xfrm>
+            <a:off x="3772823" y="3465710"/>
+            <a:ext cx="914400" cy="343041"/>
+          </a:xfrm>
+          <a:prstGeom prst="rect">
+            <a:avLst/>
+          </a:prstGeom>
+        </p:spPr>
+        <p:style>
+          <a:lnRef idx="2">
+            <a:schemeClr val="dk1"/>
+          </a:lnRef>
+          <a:fillRef idx="1">
+            <a:schemeClr val="lt1"/>
+          </a:fillRef>
+          <a:effectRef idx="0">
+            <a:schemeClr val="dk1"/>
+          </a:effectRef>
+          <a:fontRef idx="minor">
+            <a:schemeClr val="dk1"/>
+          </a:fontRef>
+        </p:style>
+        <p:txBody>
+          <a:bodyPr rtlCol="0" anchor="ctr"/>
+          <a:lstStyle/>
+          <a:p>
+            <a:pPr algn="ctr"/>
+            <a:r>
+              <a:rPr kumimoji="1" lang="en-US" altLang="ja-JP" sz="1100" dirty="0" err="1"/>
+              <a:t>bt_A_Up</a:t>
+            </a:r>
+            <a:endParaRPr kumimoji="1" lang="ja-JP" altLang="en-US" sz="1100" dirty="0"/>
+          </a:p>
+        </p:txBody>
+      </p:sp>
+      <p:sp>
+        <p:nvSpPr>
+          <p:cNvPr id="112" name="正方形/長方形 111">
+            <a:extLst>
+              <a:ext uri="{FF2B5EF4-FFF2-40B4-BE49-F238E27FC236}">
+                <a16:creationId xmlns:a16="http://schemas.microsoft.com/office/drawing/2014/main" id="{4CC00CE6-9EA7-8946-CB0D-7288F625F7BA}"/>
+              </a:ext>
+            </a:extLst>
+          </p:cNvPr>
+          <p:cNvSpPr/>
+          <p:nvPr/>
+        </p:nvSpPr>
+        <p:spPr>
+          <a:xfrm>
+            <a:off x="3650738" y="4173910"/>
+            <a:ext cx="914400" cy="343041"/>
+          </a:xfrm>
+          <a:prstGeom prst="rect">
+            <a:avLst/>
+          </a:prstGeom>
+        </p:spPr>
+        <p:style>
+          <a:lnRef idx="2">
+            <a:schemeClr val="dk1"/>
+          </a:lnRef>
+          <a:fillRef idx="1">
+            <a:schemeClr val="lt1"/>
+          </a:fillRef>
+          <a:effectRef idx="0">
+            <a:schemeClr val="dk1"/>
+          </a:effectRef>
+          <a:fontRef idx="minor">
+            <a:schemeClr val="dk1"/>
+          </a:fontRef>
+        </p:style>
+        <p:txBody>
+          <a:bodyPr rtlCol="0" anchor="ctr"/>
+          <a:lstStyle/>
+          <a:p>
+            <a:pPr algn="ctr"/>
+            <a:r>
+              <a:rPr kumimoji="1" lang="en-US" altLang="ja-JP" sz="1050" dirty="0" err="1"/>
+              <a:t>bt_A_</a:t>
+            </a:r>
+            <a:r>
+              <a:rPr lang="en-US" altLang="ja-JP" sz="1050" dirty="0" err="1"/>
+              <a:t>Down</a:t>
+            </a:r>
+            <a:endParaRPr kumimoji="1" lang="ja-JP" altLang="en-US" sz="1050" dirty="0"/>
+          </a:p>
+        </p:txBody>
+      </p:sp>
+      <p:sp>
+        <p:nvSpPr>
+          <p:cNvPr id="4" name="正方形/長方形 3">
+            <a:extLst>
+              <a:ext uri="{FF2B5EF4-FFF2-40B4-BE49-F238E27FC236}">
+                <a16:creationId xmlns:a16="http://schemas.microsoft.com/office/drawing/2014/main" id="{20FC7752-95E3-5DAF-B28D-C3ECD3BDE69B}"/>
+              </a:ext>
+            </a:extLst>
+          </p:cNvPr>
+          <p:cNvSpPr/>
+          <p:nvPr/>
+        </p:nvSpPr>
+        <p:spPr>
+          <a:xfrm>
+            <a:off x="4444198" y="807029"/>
+            <a:ext cx="670257" cy="171521"/>
+          </a:xfrm>
+          <a:prstGeom prst="rect">
+            <a:avLst/>
+          </a:prstGeom>
+        </p:spPr>
+        <p:style>
+          <a:lnRef idx="2">
+            <a:schemeClr val="dk1"/>
+          </a:lnRef>
+          <a:fillRef idx="1">
+            <a:schemeClr val="lt1"/>
+          </a:fillRef>
+          <a:effectRef idx="0">
+            <a:schemeClr val="dk1"/>
+          </a:effectRef>
+          <a:fontRef idx="minor">
+            <a:schemeClr val="dk1"/>
+          </a:fontRef>
+        </p:style>
+        <p:txBody>
+          <a:bodyPr rtlCol="0" anchor="ctr"/>
+          <a:lstStyle/>
+          <a:p>
+            <a:pPr algn="ctr"/>
+            <a:r>
+              <a:rPr kumimoji="1" lang="en-US" altLang="ja-JP" sz="1050" dirty="0" err="1"/>
+              <a:t>bt_BK</a:t>
+            </a:r>
+            <a:endParaRPr kumimoji="1" lang="ja-JP" altLang="en-US" sz="1050" dirty="0"/>
+          </a:p>
+        </p:txBody>
+      </p:sp>
+      <p:sp>
+        <p:nvSpPr>
+          <p:cNvPr id="8" name="正方形/長方形 7">
+            <a:extLst>
+              <a:ext uri="{FF2B5EF4-FFF2-40B4-BE49-F238E27FC236}">
+                <a16:creationId xmlns:a16="http://schemas.microsoft.com/office/drawing/2014/main" id="{435F7386-3AD5-ABA6-CEE5-B9EA4EEF9870}"/>
+              </a:ext>
+            </a:extLst>
+          </p:cNvPr>
+          <p:cNvSpPr/>
+          <p:nvPr/>
+        </p:nvSpPr>
+        <p:spPr>
+          <a:xfrm>
+            <a:off x="7326375" y="1790006"/>
+            <a:ext cx="705642" cy="225655"/>
+          </a:xfrm>
+          <a:prstGeom prst="rect">
+            <a:avLst/>
+          </a:prstGeom>
+        </p:spPr>
+        <p:style>
+          <a:lnRef idx="2">
+            <a:schemeClr val="dk1"/>
+          </a:lnRef>
+          <a:fillRef idx="1">
+            <a:schemeClr val="lt1"/>
+          </a:fillRef>
+          <a:effectRef idx="0">
+            <a:schemeClr val="dk1"/>
+          </a:effectRef>
+          <a:fontRef idx="minor">
+            <a:schemeClr val="dk1"/>
+          </a:fontRef>
+        </p:style>
+        <p:txBody>
+          <a:bodyPr rtlCol="0" anchor="ctr"/>
+          <a:lstStyle/>
+          <a:p>
+            <a:pPr algn="ctr"/>
+            <a:r>
+              <a:rPr kumimoji="1" lang="en-US" altLang="ja-JP" sz="1100" dirty="0" err="1"/>
+              <a:t>stp_all</a:t>
+            </a:r>
+            <a:endParaRPr kumimoji="1" lang="ja-JP" altLang="en-US" sz="1100" dirty="0"/>
+          </a:p>
+        </p:txBody>
+      </p:sp>
+      <p:sp>
+        <p:nvSpPr>
+          <p:cNvPr id="12" name="正方形/長方形 11">
+            <a:extLst>
+              <a:ext uri="{FF2B5EF4-FFF2-40B4-BE49-F238E27FC236}">
+                <a16:creationId xmlns:a16="http://schemas.microsoft.com/office/drawing/2014/main" id="{8A445A48-E934-3465-807B-DB5E97246A43}"/>
+              </a:ext>
+            </a:extLst>
+          </p:cNvPr>
+          <p:cNvSpPr/>
+          <p:nvPr/>
+        </p:nvSpPr>
+        <p:spPr>
+          <a:xfrm>
+            <a:off x="9990463" y="1812884"/>
+            <a:ext cx="705642" cy="225655"/>
+          </a:xfrm>
+          <a:prstGeom prst="rect">
+            <a:avLst/>
+          </a:prstGeom>
+        </p:spPr>
+        <p:style>
+          <a:lnRef idx="2">
+            <a:schemeClr val="dk1"/>
+          </a:lnRef>
+          <a:fillRef idx="1">
+            <a:schemeClr val="lt1"/>
+          </a:fillRef>
+          <a:effectRef idx="0">
+            <a:schemeClr val="dk1"/>
+          </a:effectRef>
+          <a:fontRef idx="minor">
+            <a:schemeClr val="dk1"/>
+          </a:fontRef>
+        </p:style>
+        <p:txBody>
+          <a:bodyPr rtlCol="0" anchor="ctr"/>
+          <a:lstStyle/>
+          <a:p>
+            <a:pPr algn="ctr"/>
+            <a:r>
+              <a:rPr kumimoji="1" lang="en-US" altLang="ja-JP" sz="1100" dirty="0" err="1"/>
+              <a:t>stp_all</a:t>
+            </a:r>
+            <a:endParaRPr kumimoji="1" lang="ja-JP" altLang="en-US" sz="1100" dirty="0"/>
+          </a:p>
+        </p:txBody>
+      </p:sp>
+      <p:sp>
+        <p:nvSpPr>
+          <p:cNvPr id="16" name="正方形/長方形 15">
+            <a:extLst>
+              <a:ext uri="{FF2B5EF4-FFF2-40B4-BE49-F238E27FC236}">
+                <a16:creationId xmlns:a16="http://schemas.microsoft.com/office/drawing/2014/main" id="{D7565B88-7B99-669B-8984-15EEBA872694}"/>
+              </a:ext>
+            </a:extLst>
+          </p:cNvPr>
+          <p:cNvSpPr/>
+          <p:nvPr/>
+        </p:nvSpPr>
+        <p:spPr>
+          <a:xfrm>
+            <a:off x="6564121" y="1081947"/>
+            <a:ext cx="867904" cy="225655"/>
+          </a:xfrm>
+          <a:prstGeom prst="rect">
+            <a:avLst/>
+          </a:prstGeom>
+        </p:spPr>
+        <p:style>
+          <a:lnRef idx="2">
+            <a:schemeClr val="dk1"/>
+          </a:lnRef>
+          <a:fillRef idx="1">
+            <a:schemeClr val="lt1"/>
+          </a:fillRef>
+          <a:effectRef idx="0">
+            <a:schemeClr val="dk1"/>
+          </a:effectRef>
+          <a:fontRef idx="minor">
+            <a:schemeClr val="dk1"/>
+          </a:fontRef>
+        </p:style>
+        <p:txBody>
+          <a:bodyPr rtlCol="0" anchor="ctr"/>
+          <a:lstStyle/>
+          <a:p>
+            <a:pPr algn="ctr"/>
+            <a:r>
+              <a:rPr kumimoji="1" lang="en-US" altLang="ja-JP" sz="1100" dirty="0" err="1"/>
+              <a:t>only_data</a:t>
+            </a:r>
+            <a:endParaRPr kumimoji="1" lang="ja-JP" altLang="en-US" sz="1100" dirty="0"/>
+          </a:p>
+        </p:txBody>
+      </p:sp>
+      <p:sp>
+        <p:nvSpPr>
+          <p:cNvPr id="20" name="正方形/長方形 19">
+            <a:extLst>
+              <a:ext uri="{FF2B5EF4-FFF2-40B4-BE49-F238E27FC236}">
+                <a16:creationId xmlns:a16="http://schemas.microsoft.com/office/drawing/2014/main" id="{852B84AD-A8B9-109A-A6E5-22F7F0A9219E}"/>
+              </a:ext>
+            </a:extLst>
+          </p:cNvPr>
+          <p:cNvSpPr/>
+          <p:nvPr/>
+        </p:nvSpPr>
+        <p:spPr>
+          <a:xfrm>
+            <a:off x="9656019" y="1309873"/>
+            <a:ext cx="867904" cy="225655"/>
+          </a:xfrm>
+          <a:prstGeom prst="rect">
+            <a:avLst/>
+          </a:prstGeom>
+        </p:spPr>
+        <p:style>
+          <a:lnRef idx="2">
+            <a:schemeClr val="dk1"/>
+          </a:lnRef>
+          <a:fillRef idx="1">
+            <a:schemeClr val="lt1"/>
+          </a:fillRef>
+          <a:effectRef idx="0">
+            <a:schemeClr val="dk1"/>
+          </a:effectRef>
+          <a:fontRef idx="minor">
+            <a:schemeClr val="dk1"/>
+          </a:fontRef>
+        </p:style>
+        <p:txBody>
+          <a:bodyPr rtlCol="0" anchor="ctr"/>
+          <a:lstStyle/>
+          <a:p>
+            <a:pPr algn="ctr"/>
+            <a:r>
+              <a:rPr kumimoji="1" lang="en-US" altLang="ja-JP" sz="1100" dirty="0" err="1"/>
+              <a:t>only_data</a:t>
+            </a:r>
+            <a:endParaRPr kumimoji="1" lang="ja-JP" altLang="en-US" sz="1100" dirty="0"/>
+          </a:p>
+        </p:txBody>
+      </p:sp>
+    </p:spTree>
+    <p:extLst>
+      <p:ext uri="{BB962C8B-B14F-4D97-AF65-F5344CB8AC3E}">
+        <p14:creationId xmlns:p14="http://schemas.microsoft.com/office/powerpoint/2010/main" val="4014964669"/>
       </p:ext>
     </p:extLst>
   </p:cSld>
